--- a/docs/ir/MCM_Luxury_Book_IR.pptx
+++ b/docs/ir/MCM_Luxury_Book_IR.pptx
@@ -1062,7 +1062,7 @@
           <a:p>
             <a:r>
               <a:rPr lang="en-US" dirty="0"/>
-              <a:t>저희는 수선을 되돌리는 일로 보지 않습니다. 그 자리에 그립니다. 그러면 세상에 하나뿐인 물건이 됩니다.</a:t>
+              <a:t>수선은 보통 흔적을 없앱니다. 저희는 그 자리에 무늬를 새깁니다. 그러면 세상에 하나뿐인 물건이 됩니다.</a:t>
             </a:r>
             <a:endParaRPr lang="en-US" dirty="0"/>
           </a:p>
@@ -4018,7 +4018,7 @@
                 <a:ea typeface="Apple SD Gothic Neo" pitchFamily="34" charset="-122"/>
                 <a:cs typeface="Apple SD Gothic Neo" pitchFamily="34" charset="-120"/>
               </a:rPr>
-              <a:t>기록이 없으면, 값을 잃습니다</a:t>
+              <a:t>기록이 없으면 값을 잃습니다</a:t>
             </a:r>
             <a:endParaRPr lang="en-US" sz="3600" dirty="0"/>
           </a:p>
@@ -5440,7 +5440,7 @@
                 <a:ea typeface="Apple SD Gothic Neo" pitchFamily="34" charset="-122"/>
                 <a:cs typeface="Apple SD Gothic Neo" pitchFamily="34" charset="-120"/>
               </a:rPr>
-              <a:t>사진 앱은 수선 이력을 가질 수 없고, 브랜드 시스템은 내 추억을 가질 수 없습니다</a:t>
+              <a:t>이 둘이 같이 있는 곳은 지금 없습니다</a:t>
             </a:r>
             <a:endParaRPr lang="en-US" sz="1400" dirty="0"/>
           </a:p>
@@ -5899,7 +5899,7 @@
                 <a:ea typeface="Apple SD Gothic Neo" pitchFamily="34" charset="-122"/>
                 <a:cs typeface="Apple SD Gothic Neo" pitchFamily="34" charset="-120"/>
               </a:rPr>
-              <a:t>제품 실사 위에서 부위를 눌러</a:t>
+              <a:t>제품 실사 위에서 부위를 눌러 접수하면</a:t>
             </a:r>
             <a:endParaRPr lang="en-US" sz="1400" dirty="0"/>
           </a:p>
@@ -5919,7 +5919,7 @@
                 <a:ea typeface="Apple SD Gothic Neo" pitchFamily="34" charset="-122"/>
                 <a:cs typeface="Apple SD Gothic Neo" pitchFamily="34" charset="-120"/>
               </a:rPr>
-              <a:t>접수하고, 이력이 그대로 남는다.</a:t>
+              <a:t>이력이 그대로 남는다.</a:t>
             </a:r>
             <a:endParaRPr lang="en-US" sz="1400" dirty="0"/>
           </a:p>
@@ -6167,12 +6167,12 @@
           <a:p>
             <a:pPr algn="ctr" indent="0" marL="0">
               <a:lnSpc>
-                <a:spcPts val="5984"/>
+                <a:spcPts val="6256"/>
               </a:lnSpc>
               <a:buNone/>
             </a:pPr>
             <a:r>
-              <a:rPr lang="en-US" sz="4400" b="1" dirty="0">
+              <a:rPr lang="en-US" sz="4600" b="1" dirty="0">
                 <a:solidFill>
                   <a:srgbClr val="FFFFFF"/>
                 </a:solidFill>
@@ -6180,19 +6180,19 @@
                 <a:ea typeface="Apple SD Gothic Neo" pitchFamily="34" charset="-122"/>
                 <a:cs typeface="Apple SD Gothic Neo" pitchFamily="34" charset="-120"/>
               </a:rPr>
-              <a:t>흠을 지우지 않습니다.</a:t>
-            </a:r>
-            <a:endParaRPr lang="en-US" sz="4400" dirty="0"/>
+              <a:t>긁힌 자리에</a:t>
+            </a:r>
+            <a:endParaRPr lang="en-US" sz="4600" dirty="0"/>
           </a:p>
           <a:p>
             <a:pPr algn="ctr" indent="0" marL="0">
               <a:lnSpc>
-                <a:spcPts val="5984"/>
+                <a:spcPts val="6256"/>
               </a:lnSpc>
               <a:buNone/>
             </a:pPr>
             <a:r>
-              <a:rPr lang="en-US" sz="4400" b="1" dirty="0">
+              <a:rPr lang="en-US" sz="4600" b="1" dirty="0">
                 <a:solidFill>
                   <a:srgbClr val="C4915F"/>
                 </a:solidFill>
@@ -6200,9 +6200,9 @@
                 <a:ea typeface="Apple SD Gothic Neo" pitchFamily="34" charset="-122"/>
                 <a:cs typeface="Apple SD Gothic Neo" pitchFamily="34" charset="-120"/>
               </a:rPr>
-              <a:t>그 자리에 그립니다.</a:t>
-            </a:r>
-            <a:endParaRPr lang="en-US" sz="4400" dirty="0"/>
+              <a:t>무늬를 새깁니다</a:t>
+            </a:r>
+            <a:endParaRPr lang="en-US" sz="4600" dirty="0"/>
           </a:p>
         </p:txBody>
       </p:sp>
@@ -7018,7 +7018,7 @@
                 <a:ea typeface="Apple SD Gothic Neo" pitchFamily="34" charset="-122"/>
                 <a:cs typeface="Apple SD Gothic Neo" pitchFamily="34" charset="-120"/>
               </a:rPr>
-              <a:t>앞의 둘은 비유입니다.</a:t>
+              <a:t>셋째는 MCM이</a:t>
             </a:r>
             <a:endParaRPr lang="en-US" sz="3800" dirty="0"/>
           </a:p>
@@ -7038,7 +7038,7 @@
                 <a:ea typeface="Apple SD Gothic Neo" pitchFamily="34" charset="-122"/>
                 <a:cs typeface="Apple SD Gothic Neo" pitchFamily="34" charset="-120"/>
               </a:rPr>
-              <a:t>셋째는 MCM 자신의 역사입니다.</a:t>
+              <a:t>직접 겪은 일입니다</a:t>
             </a:r>
             <a:endParaRPr lang="en-US" sz="3800" dirty="0"/>
           </a:p>
@@ -7413,7 +7413,7 @@
                 <a:ea typeface="Apple SD Gothic Neo" pitchFamily="34" charset="-122"/>
                 <a:cs typeface="Apple SD Gothic Neo" pitchFamily="34" charset="-120"/>
               </a:rPr>
-              <a:t>흠이 서사가 되면, 흠이 있는 쪽이 더 당당해집니다</a:t>
+              <a:t>흠이 서사가 되면 흠이 있는 쪽이 더 당당합니다</a:t>
             </a:r>
             <a:endParaRPr lang="en-US" sz="1400" dirty="0"/>
           </a:p>
@@ -7601,7 +7601,7 @@
                 <a:ea typeface="Apple SD Gothic Neo" pitchFamily="34" charset="-122"/>
                 <a:cs typeface="Apple SD Gothic Neo" pitchFamily="34" charset="-120"/>
               </a:rPr>
-              <a:t>AI가 마찰을 없애고, 흠을 무늬로 바꾼다</a:t>
+              <a:t>AI가 마찰을 없애고 흠을 무늬로 바꾼다</a:t>
             </a:r>
             <a:endParaRPr lang="en-US" sz="1500" dirty="0"/>
           </a:p>
@@ -8132,7 +8132,7 @@
                 <a:ea typeface="Apple SD Gothic Neo" pitchFamily="34" charset="-122"/>
                 <a:cs typeface="Apple SD Gothic Neo" pitchFamily="34" charset="-120"/>
               </a:rPr>
-              <a:t>기록은 흩어지고, 사라집니다</a:t>
+              <a:t>기록은 흩어졌다가 사라집니다</a:t>
             </a:r>
             <a:endParaRPr lang="en-US" sz="3600" dirty="0"/>
           </a:p>
@@ -8650,7 +8650,7 @@
                 <a:ea typeface="Apple SD Gothic Neo" pitchFamily="34" charset="-122"/>
                 <a:cs typeface="Apple SD Gothic Neo" pitchFamily="34" charset="-120"/>
               </a:rPr>
-              <a:t>AI는 쓰게 하지 않습니다.</a:t>
+              <a:t>문장은</a:t>
             </a:r>
             <a:endParaRPr lang="en-US" sz="4400" dirty="0"/>
           </a:p>
@@ -8670,7 +8670,7 @@
                 <a:ea typeface="Apple SD Gothic Neo" pitchFamily="34" charset="-122"/>
                 <a:cs typeface="Apple SD Gothic Neo" pitchFamily="34" charset="-120"/>
               </a:rPr>
-              <a:t>대신 써줍니다.</a:t>
+              <a:t>AI가 씁니다</a:t>
             </a:r>
             <a:endParaRPr lang="en-US" sz="4400" dirty="0"/>
           </a:p>
@@ -9986,7 +9986,7 @@
                 <a:ea typeface="Apple SD Gothic Neo" pitchFamily="34" charset="-122"/>
                 <a:cs typeface="Apple SD Gothic Neo" pitchFamily="34" charset="-120"/>
               </a:rPr>
-              <a:t>AI는 시안까지입니다. 실물은 MCM 장인이 만듭니다.</a:t>
+              <a:t>AI는 시안만 그립니다. 만드는 건 매장 장인입니다.</a:t>
             </a:r>
             <a:endParaRPr lang="en-US" sz="2000" dirty="0"/>
           </a:p>
@@ -10169,7 +10169,7 @@
                 <a:ea typeface="Apple SD Gothic Neo" pitchFamily="34" charset="-122"/>
                 <a:cs typeface="Apple SD Gothic Neo" pitchFamily="34" charset="-120"/>
               </a:rPr>
-              <a:t>새로 만들지 않았습니다.</a:t>
+              <a:t>MCM이 이미 가진 것을</a:t>
             </a:r>
             <a:endParaRPr lang="en-US" sz="4000" dirty="0"/>
           </a:p>
@@ -10189,7 +10189,7 @@
                 <a:ea typeface="Apple SD Gothic Neo" pitchFamily="34" charset="-122"/>
                 <a:cs typeface="Apple SD Gothic Neo" pitchFamily="34" charset="-120"/>
               </a:rPr>
-              <a:t>이미 있는 것을 썼습니다.</a:t>
+              <a:t>그대로 씁니다</a:t>
             </a:r>
             <a:endParaRPr lang="en-US" sz="4000" dirty="0"/>
           </a:p>
@@ -10365,7 +10365,7 @@
                 <a:ea typeface="Apple SD Gothic Neo" pitchFamily="34" charset="-122"/>
                 <a:cs typeface="Apple SD Gothic Neo" pitchFamily="34" charset="-120"/>
               </a:rPr>
-              <a:t>브랜드 자산을 장식으로 쓰지 않았습니다</a:t>
+              <a:t>브랜드 자산이 화면에서 일을 합니다</a:t>
             </a:r>
             <a:endParaRPr lang="en-US" sz="3200" dirty="0"/>
           </a:p>
@@ -12227,7 +12227,7 @@
                 <a:ea typeface="Apple SD Gothic Neo" pitchFamily="34" charset="-122"/>
                 <a:cs typeface="Apple SD Gothic Neo" pitchFamily="34" charset="-120"/>
               </a:rPr>
-              <a:t>집계는 동의한 사용자만 · 5건 미만 그룹 제외</a:t>
+              <a:t>동의한 사용자만 집계합니다 · 5건 미만 그룹은 뺍니다</a:t>
             </a:r>
             <a:endParaRPr lang="en-US" sz="1400" dirty="0"/>
           </a:p>
@@ -12325,7 +12325,7 @@
                 <a:ea typeface="Apple SD Gothic Neo" pitchFamily="34" charset="-122"/>
                 <a:cs typeface="Apple SD Gothic Neo" pitchFamily="34" charset="-120"/>
               </a:rPr>
-              <a:t>우리는 DPP를 만들지 않습니다.</a:t>
+              <a:t>저희 자리는</a:t>
             </a:r>
             <a:endParaRPr lang="en-US" sz="3600" dirty="0"/>
           </a:p>
@@ -12345,7 +12345,7 @@
                 <a:ea typeface="Apple SD Gothic Neo" pitchFamily="34" charset="-122"/>
                 <a:cs typeface="Apple SD Gothic Neo" pitchFamily="34" charset="-120"/>
               </a:rPr>
-              <a:t>DPP 위에서 사는 사람을 만듭니다.</a:t>
+              <a:t>DPP 위층입니다</a:t>
             </a:r>
             <a:endParaRPr lang="en-US" sz="3600" dirty="0"/>
           </a:p>
@@ -12533,7 +12533,7 @@
                 <a:ea typeface="Apple SD Gothic Neo" pitchFamily="34" charset="-122"/>
                 <a:cs typeface="Apple SD Gothic Neo" pitchFamily="34" charset="-120"/>
               </a:rPr>
-              <a:t>가격이 아니라 사용 빈도로 보면 자리가 달라진다</a:t>
+              <a:t>사용 빈도라는 축을 하나 더 두면 자리가 달라진다</a:t>
             </a:r>
             <a:endParaRPr lang="en-US" sz="1500" dirty="0"/>
           </a:p>
@@ -12787,7 +12787,7 @@
                 <a:ea typeface="Apple SD Gothic Neo" pitchFamily="34" charset="-122"/>
                 <a:cs typeface="Apple SD Gothic Neo" pitchFamily="34" charset="-120"/>
               </a:rPr>
-              <a:t>소비자가 두 번째로 앱을 여는 것</a:t>
+              <a:t>소비자가 앱을 두 번째로 여는 일</a:t>
             </a:r>
             <a:endParaRPr lang="en-US" sz="2800" dirty="0"/>
           </a:p>
@@ -14357,7 +14357,7 @@
                 <a:ea typeface="Apple SD Gothic Neo" pitchFamily="34" charset="-122"/>
                 <a:cs typeface="Apple SD Gothic Neo" pitchFamily="34" charset="-120"/>
               </a:rPr>
-              <a:t>수선이 비용 센터에서 로열티의 접점으로 바뀝니다</a:t>
+              <a:t>고칠수록 브랜드와 오래 갑니다</a:t>
             </a:r>
             <a:endParaRPr lang="en-US" sz="1600" dirty="0"/>
           </a:p>
@@ -14455,7 +14455,7 @@
                 <a:ea typeface="Apple SD Gothic Neo" pitchFamily="34" charset="-122"/>
                 <a:cs typeface="Apple SD Gothic Neo" pitchFamily="34" charset="-120"/>
               </a:rPr>
-              <a:t>MCM은 이미 인프라를 갖고 있습니다.</a:t>
+              <a:t>인프라는 MCM에 있습니다.</a:t>
             </a:r>
             <a:endParaRPr lang="en-US" sz="3400" dirty="0"/>
           </a:p>
@@ -14475,7 +14475,7 @@
                 <a:ea typeface="Apple SD Gothic Neo" pitchFamily="34" charset="-122"/>
                 <a:cs typeface="Apple SD Gothic Neo" pitchFamily="34" charset="-120"/>
               </a:rPr>
-              <a:t>저희는 그 위에 경험을 얹습니다.</a:t>
+              <a:t>경험을 얹는 일이 저희 몫입니다.</a:t>
             </a:r>
             <a:endParaRPr lang="en-US" sz="3400" dirty="0"/>
           </a:p>
@@ -14984,7 +14984,7 @@
                 <a:ea typeface="Apple SD Gothic Neo" pitchFamily="34" charset="-122"/>
                 <a:cs typeface="Apple SD Gothic Neo" pitchFamily="34" charset="-120"/>
               </a:rPr>
-              <a:t>가격이 아니라 사용 빈도로 보면</a:t>
+              <a:t>사용 빈도로 보면 자리가 다릅니다</a:t>
             </a:r>
             <a:endParaRPr lang="en-US" sz="3400" dirty="0"/>
           </a:p>
@@ -15091,7 +15091,7 @@
                 <a:ea typeface="Apple SD Gothic Neo" pitchFamily="34" charset="-122"/>
                 <a:cs typeface="Apple SD Gothic Neo" pitchFamily="34" charset="-120"/>
               </a:rPr>
-              <a:t>매일 쓰는 럭셔리</a:t>
+              <a:t>매일 드는 럭셔리</a:t>
             </a:r>
             <a:endParaRPr lang="en-US" sz="1250" dirty="0"/>
           </a:p>
@@ -15647,7 +15647,7 @@
                 <a:ea typeface="Apple SD Gothic Neo" pitchFamily="34" charset="-122"/>
                 <a:cs typeface="Apple SD Gothic Neo" pitchFamily="34" charset="-120"/>
               </a:rPr>
-              <a:t>MCM은 매일 쓸 수 있습니다</a:t>
+              <a:t>MCM은 매일 듭니다</a:t>
             </a:r>
             <a:endParaRPr lang="en-US" sz="4800" dirty="0"/>
           </a:p>
@@ -15686,7 +15686,7 @@
                 <a:ea typeface="Apple SD Gothic Neo" pitchFamily="34" charset="-122"/>
                 <a:cs typeface="Apple SD Gothic Neo" pitchFamily="34" charset="-120"/>
               </a:rPr>
-              <a:t>그것이 이 브랜드가 가진 가장 큰 자산입니다</a:t>
+              <a:t>이 브랜드의 가장 큰 자산입니다</a:t>
             </a:r>
             <a:endParaRPr lang="en-US" sz="1500" dirty="0"/>
           </a:p>
@@ -15810,12 +15810,12 @@
           <a:p>
             <a:pPr algn="ctr" indent="0" marL="0">
               <a:lnSpc>
-                <a:spcPts val="5440"/>
+                <a:spcPts val="6528"/>
               </a:lnSpc>
               <a:buNone/>
             </a:pPr>
             <a:r>
-              <a:rPr lang="en-US" sz="4000" b="1" dirty="0">
+              <a:rPr lang="en-US" sz="4800" b="1" dirty="0">
                 <a:solidFill>
                   <a:srgbClr val="FFFFFF"/>
                 </a:solidFill>
@@ -15823,29 +15823,9 @@
                 <a:ea typeface="Apple SD Gothic Neo" pitchFamily="34" charset="-122"/>
                 <a:cs typeface="Apple SD Gothic Neo" pitchFamily="34" charset="-120"/>
               </a:rPr>
-              <a:t>매일 쓰면,</a:t>
-            </a:r>
-            <a:endParaRPr lang="en-US" sz="4000" dirty="0"/>
-          </a:p>
-          <a:p>
-            <a:pPr algn="ctr" indent="0" marL="0">
-              <a:lnSpc>
-                <a:spcPts val="5440"/>
-              </a:lnSpc>
-              <a:buNone/>
-            </a:pPr>
-            <a:r>
-              <a:rPr lang="en-US" sz="4000" b="1" dirty="0">
-                <a:solidFill>
-                  <a:srgbClr val="C4915F"/>
-                </a:solidFill>
-                <a:latin typeface="Apple SD Gothic Neo" pitchFamily="34" charset="0"/>
-                <a:ea typeface="Apple SD Gothic Neo" pitchFamily="34" charset="-122"/>
-                <a:cs typeface="Apple SD Gothic Neo" pitchFamily="34" charset="-120"/>
-              </a:rPr>
-              <a:t>상합니다</a:t>
-            </a:r>
-            <a:endParaRPr lang="en-US" sz="4000" dirty="0"/>
+              <a:t>매일 쓰면 상합니다</a:t>
+            </a:r>
+            <a:endParaRPr lang="en-US" sz="4800" dirty="0"/>
           </a:p>
         </p:txBody>
       </p:sp>
@@ -16504,7 +16484,7 @@
                 <a:ea typeface="Apple SD Gothic Neo" pitchFamily="34" charset="-122"/>
                 <a:cs typeface="Apple SD Gothic Neo" pitchFamily="34" charset="-120"/>
               </a:rPr>
-              <a:t>버리기엔 아깝고,</a:t>
+              <a:t>버리기엔 아깝습니다.</a:t>
             </a:r>
             <a:endParaRPr lang="en-US" sz="1400" dirty="0"/>
           </a:p>
@@ -16524,7 +16504,7 @@
                 <a:ea typeface="Apple SD Gothic Neo" pitchFamily="34" charset="-122"/>
                 <a:cs typeface="Apple SD Gothic Neo" pitchFamily="34" charset="-120"/>
               </a:rPr>
-              <a:t>고쳐 쓸 만한 값입니다.</a:t>
+              <a:t>고쳐 쓸 값은 합니다.</a:t>
             </a:r>
             <a:endParaRPr lang="en-US" sz="1400" dirty="0"/>
           </a:p>

--- a/docs/ir/MCM_Luxury_Book_IR.pptx
+++ b/docs/ir/MCM_Luxury_Book_IR.pptx
@@ -10346,7 +10346,7 @@
         </p:nvSpPr>
         <p:spPr>
           <a:xfrm>
-            <a:off x="1188720" y="2340864"/>
+            <a:off x="1188720" y="2286000"/>
             <a:ext cx="4206240" cy="292608"/>
           </a:xfrm>
           <a:prstGeom prst="rect">
@@ -10385,7 +10385,7 @@
         </p:nvSpPr>
         <p:spPr>
           <a:xfrm>
-            <a:off x="5577840" y="2359152"/>
+            <a:off x="5577840" y="2304288"/>
             <a:ext cx="4206240" cy="274320"/>
           </a:xfrm>
           <a:prstGeom prst="rect">
@@ -10424,7 +10424,7 @@
         </p:nvSpPr>
         <p:spPr>
           <a:xfrm>
-            <a:off x="9966960" y="2350008"/>
+            <a:off x="9966960" y="2295144"/>
             <a:ext cx="1097280" cy="274320"/>
           </a:xfrm>
           <a:prstGeom prst="rect">
@@ -10463,7 +10463,7 @@
         </p:nvSpPr>
         <p:spPr>
           <a:xfrm>
-            <a:off x="1097280" y="2715768"/>
+            <a:off x="1097280" y="2633472"/>
             <a:ext cx="9966960" cy="0"/>
           </a:xfrm>
           <a:prstGeom prst="line">
@@ -10486,7 +10486,7 @@
         </p:nvSpPr>
         <p:spPr>
           <a:xfrm>
-            <a:off x="1188720" y="2825496"/>
+            <a:off x="1188720" y="2743200"/>
             <a:ext cx="4206240" cy="292608"/>
           </a:xfrm>
           <a:prstGeom prst="rect">
@@ -10525,7 +10525,7 @@
         </p:nvSpPr>
         <p:spPr>
           <a:xfrm>
-            <a:off x="5577840" y="2843784"/>
+            <a:off x="5577840" y="2761488"/>
             <a:ext cx="4206240" cy="274320"/>
           </a:xfrm>
           <a:prstGeom prst="rect">
@@ -10564,7 +10564,7 @@
         </p:nvSpPr>
         <p:spPr>
           <a:xfrm>
-            <a:off x="9966960" y="2834640"/>
+            <a:off x="9966960" y="2752344"/>
             <a:ext cx="1097280" cy="274320"/>
           </a:xfrm>
           <a:prstGeom prst="rect">
@@ -10603,7 +10603,7 @@
         </p:nvSpPr>
         <p:spPr>
           <a:xfrm>
-            <a:off x="1097280" y="3200400"/>
+            <a:off x="1097280" y="3090672"/>
             <a:ext cx="9966960" cy="0"/>
           </a:xfrm>
           <a:prstGeom prst="line">
@@ -10626,7 +10626,7 @@
         </p:nvSpPr>
         <p:spPr>
           <a:xfrm>
-            <a:off x="1188720" y="3310128"/>
+            <a:off x="1188720" y="3200400"/>
             <a:ext cx="4206240" cy="292608"/>
           </a:xfrm>
           <a:prstGeom prst="rect">
@@ -10665,7 +10665,7 @@
         </p:nvSpPr>
         <p:spPr>
           <a:xfrm>
-            <a:off x="5577840" y="3328416"/>
+            <a:off x="5577840" y="3218688"/>
             <a:ext cx="4206240" cy="274320"/>
           </a:xfrm>
           <a:prstGeom prst="rect">
@@ -10704,7 +10704,7 @@
         </p:nvSpPr>
         <p:spPr>
           <a:xfrm>
-            <a:off x="9966960" y="3319272"/>
+            <a:off x="9966960" y="3209544"/>
             <a:ext cx="1097280" cy="274320"/>
           </a:xfrm>
           <a:prstGeom prst="rect">
@@ -10743,7 +10743,7 @@
         </p:nvSpPr>
         <p:spPr>
           <a:xfrm>
-            <a:off x="1097280" y="3685032"/>
+            <a:off x="1097280" y="3547872"/>
             <a:ext cx="9966960" cy="0"/>
           </a:xfrm>
           <a:prstGeom prst="line">
@@ -10766,7 +10766,7 @@
         </p:nvSpPr>
         <p:spPr>
           <a:xfrm>
-            <a:off x="1188720" y="3794760"/>
+            <a:off x="1188720" y="3657600"/>
             <a:ext cx="4206240" cy="292608"/>
           </a:xfrm>
           <a:prstGeom prst="rect">
@@ -10805,7 +10805,7 @@
         </p:nvSpPr>
         <p:spPr>
           <a:xfrm>
-            <a:off x="5577840" y="3813048"/>
+            <a:off x="5577840" y="3675888"/>
             <a:ext cx="4206240" cy="274320"/>
           </a:xfrm>
           <a:prstGeom prst="rect">
@@ -10844,7 +10844,7 @@
         </p:nvSpPr>
         <p:spPr>
           <a:xfrm>
-            <a:off x="9966960" y="3803904"/>
+            <a:off x="9966960" y="3666744"/>
             <a:ext cx="1097280" cy="274320"/>
           </a:xfrm>
           <a:prstGeom prst="rect">
@@ -10883,7 +10883,7 @@
         </p:nvSpPr>
         <p:spPr>
           <a:xfrm>
-            <a:off x="1097280" y="4169664"/>
+            <a:off x="1097280" y="4005072"/>
             <a:ext cx="9966960" cy="0"/>
           </a:xfrm>
           <a:prstGeom prst="line">
@@ -10906,7 +10906,7 @@
         </p:nvSpPr>
         <p:spPr>
           <a:xfrm>
-            <a:off x="1188720" y="4279392"/>
+            <a:off x="1188720" y="4114800"/>
             <a:ext cx="4206240" cy="292608"/>
           </a:xfrm>
           <a:prstGeom prst="rect">
@@ -10945,7 +10945,7 @@
         </p:nvSpPr>
         <p:spPr>
           <a:xfrm>
-            <a:off x="5577840" y="4297680"/>
+            <a:off x="5577840" y="4133088"/>
             <a:ext cx="4206240" cy="274320"/>
           </a:xfrm>
           <a:prstGeom prst="rect">
@@ -10984,7 +10984,7 @@
         </p:nvSpPr>
         <p:spPr>
           <a:xfrm>
-            <a:off x="9966960" y="4288536"/>
+            <a:off x="9966960" y="4123944"/>
             <a:ext cx="1097280" cy="274320"/>
           </a:xfrm>
           <a:prstGeom prst="rect">
@@ -11023,7 +11023,7 @@
         </p:nvSpPr>
         <p:spPr>
           <a:xfrm>
-            <a:off x="1097280" y="4654296"/>
+            <a:off x="1097280" y="4462272"/>
             <a:ext cx="9966960" cy="0"/>
           </a:xfrm>
           <a:prstGeom prst="line">
@@ -11046,7 +11046,7 @@
         </p:nvSpPr>
         <p:spPr>
           <a:xfrm>
-            <a:off x="1188720" y="4764024"/>
+            <a:off x="1188720" y="4572000"/>
             <a:ext cx="4206240" cy="292608"/>
           </a:xfrm>
           <a:prstGeom prst="rect">
@@ -11085,7 +11085,7 @@
         </p:nvSpPr>
         <p:spPr>
           <a:xfrm>
-            <a:off x="5577840" y="4782312"/>
+            <a:off x="5577840" y="4590288"/>
             <a:ext cx="4206240" cy="274320"/>
           </a:xfrm>
           <a:prstGeom prst="rect">
@@ -11124,7 +11124,7 @@
         </p:nvSpPr>
         <p:spPr>
           <a:xfrm>
-            <a:off x="9966960" y="4773168"/>
+            <a:off x="9966960" y="4581144"/>
             <a:ext cx="1097280" cy="274320"/>
           </a:xfrm>
           <a:prstGeom prst="rect">
@@ -11163,7 +11163,7 @@
         </p:nvSpPr>
         <p:spPr>
           <a:xfrm>
-            <a:off x="1097280" y="5138928"/>
+            <a:off x="1097280" y="4919472"/>
             <a:ext cx="9966960" cy="0"/>
           </a:xfrm>
           <a:prstGeom prst="line">
@@ -11186,7 +11186,7 @@
         </p:nvSpPr>
         <p:spPr>
           <a:xfrm>
-            <a:off x="1188720" y="5248656"/>
+            <a:off x="1188720" y="5029200"/>
             <a:ext cx="4206240" cy="292608"/>
           </a:xfrm>
           <a:prstGeom prst="rect">
@@ -11225,7 +11225,7 @@
         </p:nvSpPr>
         <p:spPr>
           <a:xfrm>
-            <a:off x="5577840" y="5266944"/>
+            <a:off x="5577840" y="5047488"/>
             <a:ext cx="4206240" cy="274320"/>
           </a:xfrm>
           <a:prstGeom prst="rect">
@@ -11264,7 +11264,7 @@
         </p:nvSpPr>
         <p:spPr>
           <a:xfrm>
-            <a:off x="9966960" y="5257800"/>
+            <a:off x="9966960" y="5038344"/>
             <a:ext cx="1097280" cy="274320"/>
           </a:xfrm>
           <a:prstGeom prst="rect">
@@ -11303,7 +11303,7 @@
         </p:nvSpPr>
         <p:spPr>
           <a:xfrm>
-            <a:off x="1097280" y="5623560"/>
+            <a:off x="1097280" y="5376672"/>
             <a:ext cx="9966960" cy="0"/>
           </a:xfrm>
           <a:prstGeom prst="line">
@@ -11326,7 +11326,7 @@
         </p:nvSpPr>
         <p:spPr>
           <a:xfrm>
-            <a:off x="1188720" y="5733288"/>
+            <a:off x="1188720" y="5486400"/>
             <a:ext cx="4206240" cy="292608"/>
           </a:xfrm>
           <a:prstGeom prst="rect">
@@ -11351,6 +11351,146 @@
                 <a:ea typeface="Apple SD Gothic Neo" pitchFamily="34" charset="-122"/>
                 <a:cs typeface="Apple SD Gothic Neo" pitchFamily="34" charset="-120"/>
               </a:rPr>
+              <a:t>캠페인 QR 발견</a:t>
+            </a:r>
+            <a:endParaRPr lang="en-US" sz="1500" dirty="0"/>
+          </a:p>
+        </p:txBody>
+      </p:sp>
+      <p:sp>
+        <p:nvSpPr>
+          <p:cNvPr id="35" name="Text 32"/>
+          <p:cNvSpPr/>
+          <p:nvPr/>
+        </p:nvSpPr>
+        <p:spPr>
+          <a:xfrm>
+            <a:off x="5577840" y="5504688"/>
+            <a:ext cx="4206240" cy="274320"/>
+          </a:xfrm>
+          <a:prstGeom prst="rect">
+            <a:avLst/>
+          </a:prstGeom>
+          <a:noFill/>
+          <a:ln/>
+        </p:spPr>
+        <p:txBody>
+          <a:bodyPr wrap="square" lIns="0" tIns="0" rIns="0" bIns="0" rtlCol="0" anchor="ctr"/>
+          <a:lstStyle/>
+          <a:p>
+            <a:pPr indent="0" marL="0">
+              <a:buNone/>
+            </a:pPr>
+            <a:r>
+              <a:rPr lang="en-US" sz="1250" dirty="0">
+                <a:solidFill>
+                  <a:srgbClr val="9A8F84"/>
+                </a:solidFill>
+                <a:latin typeface="Apple SD Gothic Neo" pitchFamily="34" charset="0"/>
+                <a:ea typeface="Apple SD Gothic Neo" pitchFamily="34" charset="-122"/>
+                <a:cs typeface="Apple SD Gothic Neo" pitchFamily="34" charset="-120"/>
+              </a:rPr>
+              <a:t>API 분기만 · 화면 없음</a:t>
+            </a:r>
+            <a:endParaRPr lang="en-US" sz="1250" dirty="0"/>
+          </a:p>
+        </p:txBody>
+      </p:sp>
+      <p:sp>
+        <p:nvSpPr>
+          <p:cNvPr id="36" name="Text 33"/>
+          <p:cNvSpPr/>
+          <p:nvPr/>
+        </p:nvSpPr>
+        <p:spPr>
+          <a:xfrm>
+            <a:off x="9966960" y="5495544"/>
+            <a:ext cx="1097280" cy="274320"/>
+          </a:xfrm>
+          <a:prstGeom prst="rect">
+            <a:avLst/>
+          </a:prstGeom>
+          <a:noFill/>
+          <a:ln/>
+        </p:spPr>
+        <p:txBody>
+          <a:bodyPr wrap="square" lIns="0" tIns="0" rIns="0" bIns="0" rtlCol="0" anchor="ctr"/>
+          <a:lstStyle/>
+          <a:p>
+            <a:pPr algn="r" indent="0" marL="0">
+              <a:buNone/>
+            </a:pPr>
+            <a:r>
+              <a:rPr lang="en-US" sz="1250" b="1" dirty="0">
+                <a:solidFill>
+                  <a:srgbClr val="6E6459"/>
+                </a:solidFill>
+                <a:latin typeface="Apple SD Gothic Neo" pitchFamily="34" charset="0"/>
+                <a:ea typeface="Apple SD Gothic Neo" pitchFamily="34" charset="-122"/>
+                <a:cs typeface="Apple SD Gothic Neo" pitchFamily="34" charset="-120"/>
+              </a:rPr>
+              <a:t>로드맵</a:t>
+            </a:r>
+            <a:endParaRPr lang="en-US" sz="1250" dirty="0"/>
+          </a:p>
+        </p:txBody>
+      </p:sp>
+      <p:sp>
+        <p:nvSpPr>
+          <p:cNvPr id="37" name="Shape 34"/>
+          <p:cNvSpPr/>
+          <p:nvPr/>
+        </p:nvSpPr>
+        <p:spPr>
+          <a:xfrm>
+            <a:off x="1097280" y="5833872"/>
+            <a:ext cx="9966960" cy="0"/>
+          </a:xfrm>
+          <a:prstGeom prst="line">
+            <a:avLst/>
+          </a:prstGeom>
+          <a:noFill/>
+          <a:ln w="9525">
+            <a:solidFill>
+              <a:srgbClr val="3A3025"/>
+            </a:solidFill>
+            <a:prstDash val="solid"/>
+          </a:ln>
+        </p:spPr>
+      </p:sp>
+      <p:sp>
+        <p:nvSpPr>
+          <p:cNvPr id="38" name="Text 35"/>
+          <p:cNvSpPr/>
+          <p:nvPr/>
+        </p:nvSpPr>
+        <p:spPr>
+          <a:xfrm>
+            <a:off x="1188720" y="5943600"/>
+            <a:ext cx="4206240" cy="292608"/>
+          </a:xfrm>
+          <a:prstGeom prst="rect">
+            <a:avLst/>
+          </a:prstGeom>
+          <a:noFill/>
+          <a:ln/>
+        </p:spPr>
+        <p:txBody>
+          <a:bodyPr wrap="square" lIns="0" tIns="0" rIns="0" bIns="0" rtlCol="0" anchor="ctr"/>
+          <a:lstStyle/>
+          <a:p>
+            <a:pPr indent="0" marL="0">
+              <a:buNone/>
+            </a:pPr>
+            <a:r>
+              <a:rPr lang="en-US" sz="1500" b="1" dirty="0">
+                <a:solidFill>
+                  <a:srgbClr val="FFFFFF"/>
+                </a:solidFill>
+                <a:latin typeface="Apple SD Gothic Neo" pitchFamily="34" charset="0"/>
+                <a:ea typeface="Apple SD Gothic Neo" pitchFamily="34" charset="-122"/>
+                <a:cs typeface="Apple SD Gothic Neo" pitchFamily="34" charset="-120"/>
+              </a:rPr>
               <a:t>소유권 이전</a:t>
             </a:r>
             <a:endParaRPr lang="en-US" sz="1500" dirty="0"/>
@@ -11359,13 +11499,13 @@
       </p:sp>
       <p:sp>
         <p:nvSpPr>
-          <p:cNvPr id="35" name="Text 32"/>
-          <p:cNvSpPr/>
-          <p:nvPr/>
-        </p:nvSpPr>
-        <p:spPr>
-          <a:xfrm>
-            <a:off x="5577840" y="5751576"/>
+          <p:cNvPr id="39" name="Text 36"/>
+          <p:cNvSpPr/>
+          <p:nvPr/>
+        </p:nvSpPr>
+        <p:spPr>
+          <a:xfrm>
+            <a:off x="5577840" y="5961888"/>
             <a:ext cx="4206240" cy="274320"/>
           </a:xfrm>
           <a:prstGeom prst="rect">
@@ -11398,13 +11538,13 @@
       </p:sp>
       <p:sp>
         <p:nvSpPr>
-          <p:cNvPr id="36" name="Text 33"/>
-          <p:cNvSpPr/>
-          <p:nvPr/>
-        </p:nvSpPr>
-        <p:spPr>
-          <a:xfrm>
-            <a:off x="9966960" y="5742432"/>
+          <p:cNvPr id="40" name="Text 37"/>
+          <p:cNvSpPr/>
+          <p:nvPr/>
+        </p:nvSpPr>
+        <p:spPr>
+          <a:xfrm>
+            <a:off x="9966960" y="5952744"/>
             <a:ext cx="1097280" cy="274320"/>
           </a:xfrm>
           <a:prstGeom prst="rect">
@@ -11437,14 +11577,14 @@
       </p:sp>
       <p:sp>
         <p:nvSpPr>
-          <p:cNvPr id="37" name="Text 34"/>
-          <p:cNvSpPr/>
-          <p:nvPr/>
-        </p:nvSpPr>
-        <p:spPr>
-          <a:xfrm>
-            <a:off x="914400" y="6272784"/>
-            <a:ext cx="10332720" cy="329184"/>
+          <p:cNvPr id="41" name="Text 38"/>
+          <p:cNvSpPr/>
+          <p:nvPr/>
+        </p:nvSpPr>
+        <p:spPr>
+          <a:xfrm>
+            <a:off x="914400" y="6345936"/>
+            <a:ext cx="10332720" cy="310896"/>
           </a:xfrm>
           <a:prstGeom prst="rect">
             <a:avLst/>
@@ -11460,7 +11600,7 @@
               <a:buNone/>
             </a:pPr>
             <a:r>
-              <a:rPr lang="en-US" sz="1400" dirty="0">
+              <a:rPr lang="en-US" sz="1350" dirty="0">
                 <a:solidFill>
                   <a:srgbClr val="C4915F"/>
                 </a:solidFill>
@@ -11470,13 +11610,13 @@
               </a:rPr>
               <a:t>제품 상태를 AI가 판정하지 않습니다. 어디에 안 쓰는지도 적어둡니다.</a:t>
             </a:r>
-            <a:endParaRPr lang="en-US" sz="1400" dirty="0"/>
-          </a:p>
-        </p:txBody>
-      </p:sp>
-      <p:sp>
-        <p:nvSpPr>
-          <p:cNvPr id="38" name="Text 35"/>
+            <a:endParaRPr lang="en-US" sz="1350" dirty="0"/>
+          </a:p>
+        </p:txBody>
+      </p:sp>
+      <p:sp>
+        <p:nvSpPr>
+          <p:cNvPr id="42" name="Text 39"/>
           <p:cNvSpPr/>
           <p:nvPr/>
         </p:nvSpPr>
@@ -12973,7 +13113,7 @@
                 <a:ea typeface="Apple SD Gothic Neo" pitchFamily="34" charset="-122"/>
                 <a:cs typeface="Apple SD Gothic Neo" pitchFamily="34" charset="-120"/>
               </a:rPr>
-              <a:t>박스를 여는 속도는 사용자가 정합니다</a:t>
+              <a:t>박스는 손으로 끌어서 엽니다. 속도는 사용자가 정합니다</a:t>
             </a:r>
             <a:endParaRPr lang="en-US" sz="1800" dirty="0"/>
           </a:p>

--- a/docs/ir/MCM_Luxury_Book_IR.pptx
+++ b/docs/ir/MCM_Luxury_Book_IR.pptx
@@ -2119,7 +2119,7 @@
           <a:p>
             <a:r>
               <a:rPr lang="en-US" dirty="0"/>
-              <a:t>비세토스의 마름모는 바이에른 깃발에서 왔고 독일어로 흰-파란 하늘이라는 뜻입니다. 그래서 배경에서 바람에 흐릅니다.</a:t>
+              <a:t>스캔해서 도착하는 자리가 제품 상세라, 새 화면을 만들지 않고 인증 정보를 여권으로 키웠습니다. EU ESPR이 요구하는 항목을 그대로 채웁니다. 다만 수치는 아직 저희 가정치라 화면에 시연용이라고 같이 띄웁니다. 뒷받침 못 하는 숫자를 사실처럼 보여주지 않습니다. MCM 실데이터를 받으면 표시가 자동으로 사라집니다. Aura 원장 기록만 브랜드 연동이 필요합니다.</a:t>
             </a:r>
             <a:endParaRPr lang="en-US" dirty="0"/>
           </a:p>
@@ -10347,7 +10347,7 @@
         <p:spPr>
           <a:xfrm>
             <a:off x="1188720" y="2286000"/>
-            <a:ext cx="4206240" cy="292608"/>
+            <a:ext cx="3931920" cy="292608"/>
           </a:xfrm>
           <a:prstGeom prst="rect">
             <a:avLst/>
@@ -10385,8 +10385,8 @@
         </p:nvSpPr>
         <p:spPr>
           <a:xfrm>
-            <a:off x="5577840" y="2304288"/>
-            <a:ext cx="4206240" cy="274320"/>
+            <a:off x="5212080" y="2304288"/>
+            <a:ext cx="4297680" cy="274320"/>
           </a:xfrm>
           <a:prstGeom prst="rect">
             <a:avLst/>
@@ -10424,8 +10424,8 @@
         </p:nvSpPr>
         <p:spPr>
           <a:xfrm>
-            <a:off x="9966960" y="2295144"/>
-            <a:ext cx="1097280" cy="274320"/>
+            <a:off x="9601200" y="2295144"/>
+            <a:ext cx="1463040" cy="274320"/>
           </a:xfrm>
           <a:prstGeom prst="rect">
             <a:avLst/>
@@ -10487,7 +10487,7 @@
         <p:spPr>
           <a:xfrm>
             <a:off x="1188720" y="2743200"/>
-            <a:ext cx="4206240" cy="292608"/>
+            <a:ext cx="3931920" cy="292608"/>
           </a:xfrm>
           <a:prstGeom prst="rect">
             <a:avLst/>
@@ -10525,8 +10525,8 @@
         </p:nvSpPr>
         <p:spPr>
           <a:xfrm>
-            <a:off x="5577840" y="2761488"/>
-            <a:ext cx="4206240" cy="274320"/>
+            <a:off x="5212080" y="2761488"/>
+            <a:ext cx="4297680" cy="274320"/>
           </a:xfrm>
           <a:prstGeom prst="rect">
             <a:avLst/>
@@ -10564,8 +10564,8 @@
         </p:nvSpPr>
         <p:spPr>
           <a:xfrm>
-            <a:off x="9966960" y="2752344"/>
-            <a:ext cx="1097280" cy="274320"/>
+            <a:off x="9601200" y="2752344"/>
+            <a:ext cx="1463040" cy="274320"/>
           </a:xfrm>
           <a:prstGeom prst="rect">
             <a:avLst/>
@@ -10627,7 +10627,7 @@
         <p:spPr>
           <a:xfrm>
             <a:off x="1188720" y="3200400"/>
-            <a:ext cx="4206240" cy="292608"/>
+            <a:ext cx="3931920" cy="292608"/>
           </a:xfrm>
           <a:prstGeom prst="rect">
             <a:avLst/>
@@ -10651,7 +10651,7 @@
                 <a:ea typeface="Apple SD Gothic Neo" pitchFamily="34" charset="-122"/>
                 <a:cs typeface="Apple SD Gothic Neo" pitchFamily="34" charset="-120"/>
               </a:rPr>
-              <a:t>수선 부위 선택 · 접수</a:t>
+              <a:t>GS1 Digital Link 태그</a:t>
             </a:r>
             <a:endParaRPr lang="en-US" sz="1500" dirty="0"/>
           </a:p>
@@ -10665,8 +10665,8 @@
         </p:nvSpPr>
         <p:spPr>
           <a:xfrm>
-            <a:off x="5577840" y="3218688"/>
-            <a:ext cx="4206240" cy="274320"/>
+            <a:off x="5212080" y="3218688"/>
+            <a:ext cx="4297680" cy="274320"/>
           </a:xfrm>
           <a:prstGeom prst="rect">
             <a:avLst/>
@@ -10690,7 +10690,7 @@
                 <a:ea typeface="Apple SD Gothic Neo" pitchFamily="34" charset="-122"/>
                 <a:cs typeface="Apple SD Gothic Neo" pitchFamily="34" charset="-120"/>
               </a:rPr>
-              <a:t>제품 실사 위 좌표</a:t>
+              <a:t>/01/{gtin}/21/{serial} 표준 라우팅</a:t>
             </a:r>
             <a:endParaRPr lang="en-US" sz="1250" dirty="0"/>
           </a:p>
@@ -10704,8 +10704,8 @@
         </p:nvSpPr>
         <p:spPr>
           <a:xfrm>
-            <a:off x="9966960" y="3209544"/>
-            <a:ext cx="1097280" cy="274320"/>
+            <a:off x="9601200" y="3209544"/>
+            <a:ext cx="1463040" cy="274320"/>
           </a:xfrm>
           <a:prstGeom prst="rect">
             <a:avLst/>
@@ -10767,7 +10767,7 @@
         <p:spPr>
           <a:xfrm>
             <a:off x="1188720" y="3657600"/>
-            <a:ext cx="4206240" cy="292608"/>
+            <a:ext cx="3931920" cy="292608"/>
           </a:xfrm>
           <a:prstGeom prst="rect">
             <a:avLst/>
@@ -10791,7 +10791,7 @@
                 <a:ea typeface="Apple SD Gothic Neo" pitchFamily="34" charset="-122"/>
                 <a:cs typeface="Apple SD Gothic Neo" pitchFamily="34" charset="-120"/>
               </a:rPr>
-              <a:t>상황 데이터 집계</a:t>
+              <a:t>EU ESPR 여권 항목</a:t>
             </a:r>
             <a:endParaRPr lang="en-US" sz="1500" dirty="0"/>
           </a:p>
@@ -10805,8 +10805,8 @@
         </p:nvSpPr>
         <p:spPr>
           <a:xfrm>
-            <a:off x="5577840" y="3675888"/>
-            <a:ext cx="4206240" cy="274320"/>
+            <a:off x="5212080" y="3675888"/>
+            <a:ext cx="4297680" cy="274320"/>
           </a:xfrm>
           <a:prstGeom prst="rect">
             <a:avLst/>
@@ -10830,7 +10830,7 @@
                 <a:ea typeface="Apple SD Gothic Neo" pitchFamily="34" charset="-122"/>
                 <a:cs typeface="Apple SD Gothic Neo" pitchFamily="34" charset="-120"/>
               </a:rPr>
-              <a:t>동의 기반 · k-익명성</a:t>
+              <a:t>소재 구성 · 재활용 함량 · 수리가능성 · 원산지</a:t>
             </a:r>
             <a:endParaRPr lang="en-US" sz="1250" dirty="0"/>
           </a:p>
@@ -10844,8 +10844,8 @@
         </p:nvSpPr>
         <p:spPr>
           <a:xfrm>
-            <a:off x="9966960" y="3666744"/>
-            <a:ext cx="1097280" cy="274320"/>
+            <a:off x="9601200" y="3666744"/>
+            <a:ext cx="1463040" cy="274320"/>
           </a:xfrm>
           <a:prstGeom prst="rect">
             <a:avLst/>
@@ -10907,7 +10907,7 @@
         <p:spPr>
           <a:xfrm>
             <a:off x="1188720" y="4114800"/>
-            <a:ext cx="4206240" cy="292608"/>
+            <a:ext cx="3931920" cy="292608"/>
           </a:xfrm>
           <a:prstGeom prst="rect">
             <a:avLst/>
@@ -10931,7 +10931,7 @@
                 <a:ea typeface="Apple SD Gothic Neo" pitchFamily="34" charset="-122"/>
                 <a:cs typeface="Apple SD Gothic Neo" pitchFamily="34" charset="-120"/>
               </a:rPr>
-              <a:t>Care Score</a:t>
+              <a:t>수선 접수 · 상황 데이터 집계</a:t>
             </a:r>
             <a:endParaRPr lang="en-US" sz="1500" dirty="0"/>
           </a:p>
@@ -10945,8 +10945,8 @@
         </p:nvSpPr>
         <p:spPr>
           <a:xfrm>
-            <a:off x="5577840" y="4133088"/>
-            <a:ext cx="4206240" cy="274320"/>
+            <a:off x="5212080" y="4133088"/>
+            <a:ext cx="4297680" cy="274320"/>
           </a:xfrm>
           <a:prstGeom prst="rect">
             <a:avLst/>
@@ -10970,7 +10970,7 @@
                 <a:ea typeface="Apple SD Gothic Neo" pitchFamily="34" charset="-122"/>
                 <a:cs typeface="Apple SD Gothic Neo" pitchFamily="34" charset="-120"/>
               </a:rPr>
-              <a:t>기록 기반 규칙 계산 · AI 아님</a:t>
+              <a:t>실사 위 좌표 · 동의 기반 k-익명성</a:t>
             </a:r>
             <a:endParaRPr lang="en-US" sz="1250" dirty="0"/>
           </a:p>
@@ -10984,8 +10984,8 @@
         </p:nvSpPr>
         <p:spPr>
           <a:xfrm>
-            <a:off x="9966960" y="4123944"/>
-            <a:ext cx="1097280" cy="274320"/>
+            <a:off x="9601200" y="4123944"/>
+            <a:ext cx="1463040" cy="274320"/>
           </a:xfrm>
           <a:prstGeom prst="rect">
             <a:avLst/>
@@ -11003,13 +11003,13 @@
             <a:r>
               <a:rPr lang="en-US" sz="1250" b="1" dirty="0">
                 <a:solidFill>
-                  <a:srgbClr val="FFFFFF"/>
-                </a:solidFill>
-                <a:latin typeface="Apple SD Gothic Neo" pitchFamily="34" charset="0"/>
-                <a:ea typeface="Apple SD Gothic Neo" pitchFamily="34" charset="-122"/>
-                <a:cs typeface="Apple SD Gothic Neo" pitchFamily="34" charset="-120"/>
-              </a:rPr>
-              <a:t>규칙</a:t>
+                  <a:srgbClr val="C4915F"/>
+                </a:solidFill>
+                <a:latin typeface="Apple SD Gothic Neo" pitchFamily="34" charset="0"/>
+                <a:ea typeface="Apple SD Gothic Neo" pitchFamily="34" charset="-122"/>
+                <a:cs typeface="Apple SD Gothic Neo" pitchFamily="34" charset="-120"/>
+              </a:rPr>
+              <a:t>구현</a:t>
             </a:r>
             <a:endParaRPr lang="en-US" sz="1250" dirty="0"/>
           </a:p>
@@ -11047,7 +11047,7 @@
         <p:spPr>
           <a:xfrm>
             <a:off x="1188720" y="4572000"/>
-            <a:ext cx="4206240" cy="292608"/>
+            <a:ext cx="3931920" cy="292608"/>
           </a:xfrm>
           <a:prstGeom prst="rect">
             <a:avLst/>
@@ -11071,7 +11071,7 @@
                 <a:ea typeface="Apple SD Gothic Neo" pitchFamily="34" charset="-122"/>
                 <a:cs typeface="Apple SD Gothic Neo" pitchFamily="34" charset="-120"/>
               </a:rPr>
-              <a:t>수선 견적</a:t>
+              <a:t>Care Score · 수선 견적</a:t>
             </a:r>
             <a:endParaRPr lang="en-US" sz="1500" dirty="0"/>
           </a:p>
@@ -11085,8 +11085,8 @@
         </p:nvSpPr>
         <p:spPr>
           <a:xfrm>
-            <a:off x="5577840" y="4590288"/>
-            <a:ext cx="4206240" cy="274320"/>
+            <a:off x="5212080" y="4590288"/>
+            <a:ext cx="4297680" cy="274320"/>
           </a:xfrm>
           <a:prstGeom prst="rect">
             <a:avLst/>
@@ -11110,7 +11110,7 @@
                 <a:ea typeface="Apple SD Gothic Neo" pitchFamily="34" charset="-122"/>
                 <a:cs typeface="Apple SD Gothic Neo" pitchFamily="34" charset="-120"/>
               </a:rPr>
-              <a:t>기준표 계산 · AI는 설명문만</a:t>
+              <a:t>기록 기반 규칙 계산 · AI 아님</a:t>
             </a:r>
             <a:endParaRPr lang="en-US" sz="1250" dirty="0"/>
           </a:p>
@@ -11124,8 +11124,8 @@
         </p:nvSpPr>
         <p:spPr>
           <a:xfrm>
-            <a:off x="9966960" y="4581144"/>
-            <a:ext cx="1097280" cy="274320"/>
+            <a:off x="9601200" y="4581144"/>
+            <a:ext cx="1463040" cy="274320"/>
           </a:xfrm>
           <a:prstGeom prst="rect">
             <a:avLst/>
@@ -11187,7 +11187,7 @@
         <p:spPr>
           <a:xfrm>
             <a:off x="1188720" y="5029200"/>
-            <a:ext cx="4206240" cy="292608"/>
+            <a:ext cx="3931920" cy="292608"/>
           </a:xfrm>
           <a:prstGeom prst="rect">
             <a:avLst/>
@@ -11211,7 +11211,7 @@
                 <a:ea typeface="Apple SD Gothic Neo" pitchFamily="34" charset="-122"/>
                 <a:cs typeface="Apple SD Gothic Neo" pitchFamily="34" charset="-120"/>
               </a:rPr>
-              <a:t>결제</a:t>
+              <a:t>여권 수치 · 결제</a:t>
             </a:r>
             <a:endParaRPr lang="en-US" sz="1500" dirty="0"/>
           </a:p>
@@ -11225,8 +11225,8 @@
         </p:nvSpPr>
         <p:spPr>
           <a:xfrm>
-            <a:off x="5577840" y="5047488"/>
-            <a:ext cx="4206240" cy="274320"/>
+            <a:off x="5212080" y="5047488"/>
+            <a:ext cx="4297680" cy="274320"/>
           </a:xfrm>
           <a:prstGeom prst="rect">
             <a:avLst/>
@@ -11250,7 +11250,7 @@
                 <a:ea typeface="Apple SD Gothic Neo" pitchFamily="34" charset="-122"/>
                 <a:cs typeface="Apple SD Gothic Neo" pitchFamily="34" charset="-120"/>
               </a:rPr>
-              <a:t>데모 · 실제 정산 없음</a:t>
+              <a:t>시연용 가정치 · 실제 정산 없음</a:t>
             </a:r>
             <a:endParaRPr lang="en-US" sz="1250" dirty="0"/>
           </a:p>
@@ -11264,8 +11264,8 @@
         </p:nvSpPr>
         <p:spPr>
           <a:xfrm>
-            <a:off x="9966960" y="5038344"/>
-            <a:ext cx="1097280" cy="274320"/>
+            <a:off x="9601200" y="5038344"/>
+            <a:ext cx="1463040" cy="274320"/>
           </a:xfrm>
           <a:prstGeom prst="rect">
             <a:avLst/>
@@ -11327,7 +11327,7 @@
         <p:spPr>
           <a:xfrm>
             <a:off x="1188720" y="5486400"/>
-            <a:ext cx="4206240" cy="292608"/>
+            <a:ext cx="3931920" cy="292608"/>
           </a:xfrm>
           <a:prstGeom prst="rect">
             <a:avLst/>
@@ -11351,7 +11351,7 @@
                 <a:ea typeface="Apple SD Gothic Neo" pitchFamily="34" charset="-122"/>
                 <a:cs typeface="Apple SD Gothic Neo" pitchFamily="34" charset="-120"/>
               </a:rPr>
-              <a:t>캠페인 QR 발견</a:t>
+              <a:t>Aura 원장 기록</a:t>
             </a:r>
             <a:endParaRPr lang="en-US" sz="1500" dirty="0"/>
           </a:p>
@@ -11365,8 +11365,8 @@
         </p:nvSpPr>
         <p:spPr>
           <a:xfrm>
-            <a:off x="5577840" y="5504688"/>
-            <a:ext cx="4206240" cy="274320"/>
+            <a:off x="5212080" y="5504688"/>
+            <a:ext cx="4297680" cy="274320"/>
           </a:xfrm>
           <a:prstGeom prst="rect">
             <a:avLst/>
@@ -11390,7 +11390,7 @@
                 <a:ea typeface="Apple SD Gothic Neo" pitchFamily="34" charset="-122"/>
                 <a:cs typeface="Apple SD Gothic Neo" pitchFamily="34" charset="-120"/>
               </a:rPr>
-              <a:t>API 분기만 · 화면 없음</a:t>
+              <a:t>브랜드 연동 필요</a:t>
             </a:r>
             <a:endParaRPr lang="en-US" sz="1250" dirty="0"/>
           </a:p>
@@ -11404,8 +11404,8 @@
         </p:nvSpPr>
         <p:spPr>
           <a:xfrm>
-            <a:off x="9966960" y="5495544"/>
-            <a:ext cx="1097280" cy="274320"/>
+            <a:off x="9601200" y="5495544"/>
+            <a:ext cx="1463040" cy="274320"/>
           </a:xfrm>
           <a:prstGeom prst="rect">
             <a:avLst/>
@@ -11423,13 +11423,13 @@
             <a:r>
               <a:rPr lang="en-US" sz="1250" b="1" dirty="0">
                 <a:solidFill>
-                  <a:srgbClr val="6E6459"/>
-                </a:solidFill>
-                <a:latin typeface="Apple SD Gothic Neo" pitchFamily="34" charset="0"/>
-                <a:ea typeface="Apple SD Gothic Neo" pitchFamily="34" charset="-122"/>
-                <a:cs typeface="Apple SD Gothic Neo" pitchFamily="34" charset="-120"/>
-              </a:rPr>
-              <a:t>로드맵</a:t>
+                  <a:srgbClr val="9A8F84"/>
+                </a:solidFill>
+                <a:latin typeface="Apple SD Gothic Neo" pitchFamily="34" charset="0"/>
+                <a:ea typeface="Apple SD Gothic Neo" pitchFamily="34" charset="-122"/>
+                <a:cs typeface="Apple SD Gothic Neo" pitchFamily="34" charset="-120"/>
+              </a:rPr>
+              <a:t>연동 예정</a:t>
             </a:r>
             <a:endParaRPr lang="en-US" sz="1250" dirty="0"/>
           </a:p>
@@ -11467,7 +11467,7 @@
         <p:spPr>
           <a:xfrm>
             <a:off x="1188720" y="5943600"/>
-            <a:ext cx="4206240" cy="292608"/>
+            <a:ext cx="3931920" cy="292608"/>
           </a:xfrm>
           <a:prstGeom prst="rect">
             <a:avLst/>
@@ -11491,7 +11491,7 @@
                 <a:ea typeface="Apple SD Gothic Neo" pitchFamily="34" charset="-122"/>
                 <a:cs typeface="Apple SD Gothic Neo" pitchFamily="34" charset="-120"/>
               </a:rPr>
-              <a:t>소유권 이전</a:t>
+              <a:t>캠페인 QR · 소유권 이전</a:t>
             </a:r>
             <a:endParaRPr lang="en-US" sz="1500" dirty="0"/>
           </a:p>
@@ -11505,8 +11505,8 @@
         </p:nvSpPr>
         <p:spPr>
           <a:xfrm>
-            <a:off x="5577840" y="5961888"/>
-            <a:ext cx="4206240" cy="274320"/>
+            <a:off x="5212080" y="5961888"/>
+            <a:ext cx="4297680" cy="274320"/>
           </a:xfrm>
           <a:prstGeom prst="rect">
             <a:avLst/>
@@ -11530,7 +11530,7 @@
                 <a:ea typeface="Apple SD Gothic Neo" pitchFamily="34" charset="-122"/>
                 <a:cs typeface="Apple SD Gothic Neo" pitchFamily="34" charset="-120"/>
               </a:rPr>
-              <a:t>스키마만 · 화면 없음</a:t>
+              <a:t>화면 없음</a:t>
             </a:r>
             <a:endParaRPr lang="en-US" sz="1250" dirty="0"/>
           </a:p>
@@ -11544,8 +11544,8 @@
         </p:nvSpPr>
         <p:spPr>
           <a:xfrm>
-            <a:off x="9966960" y="5952744"/>
-            <a:ext cx="1097280" cy="274320"/>
+            <a:off x="9601200" y="5952744"/>
+            <a:ext cx="1463040" cy="274320"/>
           </a:xfrm>
           <a:prstGeom prst="rect">
             <a:avLst/>
@@ -11899,7 +11899,7 @@
                 <a:ea typeface="Apple SD Gothic Neo" pitchFamily="34" charset="-122"/>
                 <a:cs typeface="Apple SD Gothic Neo" pitchFamily="34" charset="-120"/>
               </a:rPr>
-              <a:t>BRAND ASSETS</a:t>
+              <a:t>DIGITAL PRODUCT PASSPORT</a:t>
             </a:r>
             <a:endParaRPr lang="en-US" sz="1150" dirty="0"/>
           </a:p>
@@ -11928,12 +11928,12 @@
           <a:p>
             <a:pPr algn="ctr" indent="0" marL="0">
               <a:lnSpc>
-                <a:spcPts val="4288"/>
+                <a:spcPts val="4556"/>
               </a:lnSpc>
               <a:buNone/>
             </a:pPr>
             <a:r>
-              <a:rPr lang="en-US" sz="3200" b="1" dirty="0">
+              <a:rPr lang="en-US" sz="3400" b="1" dirty="0">
                 <a:solidFill>
                   <a:srgbClr val="FFFFFF"/>
                 </a:solidFill>
@@ -11941,9 +11941,9 @@
                 <a:ea typeface="Apple SD Gothic Neo" pitchFamily="34" charset="-122"/>
                 <a:cs typeface="Apple SD Gothic Neo" pitchFamily="34" charset="-120"/>
               </a:rPr>
-              <a:t>브랜드 자산이 화면에서 일을 합니다</a:t>
-            </a:r>
-            <a:endParaRPr lang="en-US" sz="3200" dirty="0"/>
+              <a:t>스캔하면 도착하는 자리입니다</a:t>
+            </a:r>
+            <a:endParaRPr lang="en-US" sz="3400" dirty="0"/>
           </a:p>
         </p:txBody>
       </p:sp>
@@ -11994,8 +11994,8 @@
         </p:nvSpPr>
         <p:spPr>
           <a:xfrm>
-            <a:off x="1188720" y="2926080"/>
-            <a:ext cx="3108960" cy="347472"/>
+            <a:off x="1188720" y="2487168"/>
+            <a:ext cx="1554480" cy="274320"/>
           </a:xfrm>
           <a:prstGeom prst="rect">
             <a:avLst/>
@@ -12011,7 +12011,46 @@
               <a:buNone/>
             </a:pPr>
             <a:r>
-              <a:rPr lang="en-US" sz="1800" b="1" dirty="0">
+              <a:rPr lang="en-US" sz="1250" dirty="0">
+                <a:solidFill>
+                  <a:srgbClr val="6E6459"/>
+                </a:solidFill>
+                <a:latin typeface="Apple SD Gothic Neo" pitchFamily="34" charset="0"/>
+                <a:ea typeface="Apple SD Gothic Neo" pitchFamily="34" charset="-122"/>
+                <a:cs typeface="Apple SD Gothic Neo" pitchFamily="34" charset="-120"/>
+              </a:rPr>
+              <a:t>시리얼</a:t>
+            </a:r>
+            <a:endParaRPr lang="en-US" sz="1250" dirty="0"/>
+          </a:p>
+        </p:txBody>
+      </p:sp>
+      <p:sp>
+        <p:nvSpPr>
+          <p:cNvPr id="7" name="Text 4"/>
+          <p:cNvSpPr/>
+          <p:nvPr/>
+        </p:nvSpPr>
+        <p:spPr>
+          <a:xfrm>
+            <a:off x="2788920" y="2478024"/>
+            <a:ext cx="2880360" cy="292608"/>
+          </a:xfrm>
+          <a:prstGeom prst="rect">
+            <a:avLst/>
+          </a:prstGeom>
+          <a:noFill/>
+          <a:ln/>
+        </p:spPr>
+        <p:txBody>
+          <a:bodyPr wrap="square" lIns="0" tIns="0" rIns="0" bIns="0" rtlCol="0" anchor="ctr"/>
+          <a:lstStyle/>
+          <a:p>
+            <a:pPr indent="0" marL="0">
+              <a:buNone/>
+            </a:pPr>
+            <a:r>
+              <a:rPr lang="en-US" sz="1300" dirty="0">
                 <a:solidFill>
                   <a:srgbClr val="FFFFFF"/>
                 </a:solidFill>
@@ -12019,100 +12058,22 @@
                 <a:ea typeface="Apple SD Gothic Neo" pitchFamily="34" charset="-122"/>
                 <a:cs typeface="Apple SD Gothic Neo" pitchFamily="34" charset="-120"/>
               </a:rPr>
-              <a:t>비세토스 마름모</a:t>
-            </a:r>
-            <a:endParaRPr lang="en-US" sz="1800" dirty="0"/>
-          </a:p>
-        </p:txBody>
-      </p:sp>
-      <p:sp>
-        <p:nvSpPr>
-          <p:cNvPr id="7" name="Text 4"/>
-          <p:cNvSpPr/>
-          <p:nvPr/>
-        </p:nvSpPr>
-        <p:spPr>
-          <a:xfrm>
-            <a:off x="4572000" y="2962656"/>
-            <a:ext cx="3657600" cy="310896"/>
-          </a:xfrm>
-          <a:prstGeom prst="rect">
-            <a:avLst/>
-          </a:prstGeom>
-          <a:noFill/>
-          <a:ln/>
-        </p:spPr>
-        <p:txBody>
-          <a:bodyPr wrap="square" lIns="0" tIns="0" rIns="0" bIns="0" rtlCol="0" anchor="ctr"/>
-          <a:lstStyle/>
-          <a:p>
-            <a:pPr indent="0" marL="0">
-              <a:buNone/>
-            </a:pPr>
-            <a:r>
-              <a:rPr lang="en-US" sz="1400" dirty="0">
-                <a:solidFill>
-                  <a:srgbClr val="9A8F84"/>
-                </a:solidFill>
-                <a:latin typeface="Apple SD Gothic Neo" pitchFamily="34" charset="0"/>
-                <a:ea typeface="Apple SD Gothic Neo" pitchFamily="34" charset="-122"/>
-                <a:cs typeface="Apple SD Gothic Neo" pitchFamily="34" charset="-120"/>
-              </a:rPr>
-              <a:t>바이에른 깃발 = 흰-파란 하늘</a:t>
-            </a:r>
-            <a:endParaRPr lang="en-US" sz="1400" dirty="0"/>
-          </a:p>
-        </p:txBody>
-      </p:sp>
-      <p:sp>
-        <p:nvSpPr>
-          <p:cNvPr id="8" name="Text 5"/>
-          <p:cNvSpPr/>
-          <p:nvPr/>
-        </p:nvSpPr>
-        <p:spPr>
-          <a:xfrm>
-            <a:off x="8503920" y="2944368"/>
-            <a:ext cx="2468880" cy="329184"/>
-          </a:xfrm>
-          <a:prstGeom prst="rect">
-            <a:avLst/>
-          </a:prstGeom>
-          <a:noFill/>
-          <a:ln/>
-        </p:spPr>
-        <p:txBody>
-          <a:bodyPr wrap="square" lIns="0" tIns="0" rIns="0" bIns="0" rtlCol="0" anchor="ctr"/>
-          <a:lstStyle/>
-          <a:p>
-            <a:pPr algn="r" indent="0" marL="0">
-              <a:buNone/>
-            </a:pPr>
-            <a:r>
-              <a:rPr lang="en-US" sz="1500" dirty="0">
-                <a:solidFill>
-                  <a:srgbClr val="FFFFFF"/>
-                </a:solidFill>
-                <a:latin typeface="Apple SD Gothic Neo" pitchFamily="34" charset="0"/>
-                <a:ea typeface="Apple SD Gothic Neo" pitchFamily="34" charset="-122"/>
-                <a:cs typeface="Apple SD Gothic Neo" pitchFamily="34" charset="-120"/>
-              </a:rPr>
-              <a:t>배경에서 바람에 흐른다</a:t>
-            </a:r>
-            <a:endParaRPr lang="en-US" sz="1500" dirty="0"/>
-          </a:p>
-        </p:txBody>
-      </p:sp>
-      <p:sp>
-        <p:nvSpPr>
-          <p:cNvPr id="9" name="Shape 6"/>
-          <p:cNvSpPr/>
-          <p:nvPr/>
-        </p:nvSpPr>
-        <p:spPr>
-          <a:xfrm>
-            <a:off x="1097280" y="3547872"/>
-            <a:ext cx="9966960" cy="0"/>
+              <a:t>MWKCSVE01C0002</a:t>
+            </a:r>
+            <a:endParaRPr lang="en-US" sz="1300" dirty="0"/>
+          </a:p>
+        </p:txBody>
+      </p:sp>
+      <p:sp>
+        <p:nvSpPr>
+          <p:cNvPr id="8" name="Shape 5"/>
+          <p:cNvSpPr/>
+          <p:nvPr/>
+        </p:nvSpPr>
+        <p:spPr>
+          <a:xfrm>
+            <a:off x="1188720" y="2907792"/>
+            <a:ext cx="4480560" cy="0"/>
           </a:xfrm>
           <a:prstGeom prst="line">
             <a:avLst/>
@@ -12128,14 +12089,53 @@
       </p:sp>
       <p:sp>
         <p:nvSpPr>
+          <p:cNvPr id="9" name="Text 6"/>
+          <p:cNvSpPr/>
+          <p:nvPr/>
+        </p:nvSpPr>
+        <p:spPr>
+          <a:xfrm>
+            <a:off x="1188720" y="3054096"/>
+            <a:ext cx="1554480" cy="274320"/>
+          </a:xfrm>
+          <a:prstGeom prst="rect">
+            <a:avLst/>
+          </a:prstGeom>
+          <a:noFill/>
+          <a:ln/>
+        </p:spPr>
+        <p:txBody>
+          <a:bodyPr wrap="square" lIns="0" tIns="0" rIns="0" bIns="0" rtlCol="0" anchor="ctr"/>
+          <a:lstStyle/>
+          <a:p>
+            <a:pPr indent="0" marL="0">
+              <a:buNone/>
+            </a:pPr>
+            <a:r>
+              <a:rPr lang="en-US" sz="1250" dirty="0">
+                <a:solidFill>
+                  <a:srgbClr val="6E6459"/>
+                </a:solidFill>
+                <a:latin typeface="Apple SD Gothic Neo" pitchFamily="34" charset="0"/>
+                <a:ea typeface="Apple SD Gothic Neo" pitchFamily="34" charset="-122"/>
+                <a:cs typeface="Apple SD Gothic Neo" pitchFamily="34" charset="-120"/>
+              </a:rPr>
+              <a:t>구매처</a:t>
+            </a:r>
+            <a:endParaRPr lang="en-US" sz="1250" dirty="0"/>
+          </a:p>
+        </p:txBody>
+      </p:sp>
+      <p:sp>
+        <p:nvSpPr>
           <p:cNvPr id="10" name="Text 7"/>
           <p:cNvSpPr/>
           <p:nvPr/>
         </p:nvSpPr>
         <p:spPr>
           <a:xfrm>
-            <a:off x="1188720" y="3749040"/>
-            <a:ext cx="3108960" cy="347472"/>
+            <a:off x="2788920" y="3044952"/>
+            <a:ext cx="2880360" cy="292608"/>
           </a:xfrm>
           <a:prstGeom prst="rect">
             <a:avLst/>
@@ -12151,7 +12151,7 @@
               <a:buNone/>
             </a:pPr>
             <a:r>
-              <a:rPr lang="en-US" sz="1800" b="1" dirty="0">
+              <a:rPr lang="en-US" sz="1300" dirty="0">
                 <a:solidFill>
                   <a:srgbClr val="FFFFFF"/>
                 </a:solidFill>
@@ -12159,100 +12159,22 @@
                 <a:ea typeface="Apple SD Gothic Neo" pitchFamily="34" charset="-122"/>
                 <a:cs typeface="Apple SD Gothic Neo" pitchFamily="34" charset="-120"/>
               </a:rPr>
-              <a:t>로렐</a:t>
-            </a:r>
-            <a:endParaRPr lang="en-US" sz="1800" dirty="0"/>
-          </a:p>
-        </p:txBody>
-      </p:sp>
-      <p:sp>
-        <p:nvSpPr>
-          <p:cNvPr id="11" name="Text 8"/>
-          <p:cNvSpPr/>
-          <p:nvPr/>
-        </p:nvSpPr>
-        <p:spPr>
-          <a:xfrm>
-            <a:off x="4572000" y="3785616"/>
-            <a:ext cx="3657600" cy="310896"/>
-          </a:xfrm>
-          <a:prstGeom prst="rect">
-            <a:avLst/>
-          </a:prstGeom>
-          <a:noFill/>
-          <a:ln/>
-        </p:spPr>
-        <p:txBody>
-          <a:bodyPr wrap="square" lIns="0" tIns="0" rIns="0" bIns="0" rtlCol="0" anchor="ctr"/>
-          <a:lstStyle/>
-          <a:p>
-            <a:pPr indent="0" marL="0">
-              <a:buNone/>
-            </a:pPr>
-            <a:r>
-              <a:rPr lang="en-US" sz="1400" dirty="0">
-                <a:solidFill>
-                  <a:srgbClr val="9A8F84"/>
-                </a:solidFill>
-                <a:latin typeface="Apple SD Gothic Neo" pitchFamily="34" charset="0"/>
-                <a:ea typeface="Apple SD Gothic Neo" pitchFamily="34" charset="-122"/>
-                <a:cs typeface="Apple SD Gothic Neo" pitchFamily="34" charset="-120"/>
-              </a:rPr>
-              <a:t>승리 · 명예의 상징</a:t>
-            </a:r>
-            <a:endParaRPr lang="en-US" sz="1400" dirty="0"/>
-          </a:p>
-        </p:txBody>
-      </p:sp>
-      <p:sp>
-        <p:nvSpPr>
-          <p:cNvPr id="12" name="Text 9"/>
-          <p:cNvSpPr/>
-          <p:nvPr/>
-        </p:nvSpPr>
-        <p:spPr>
-          <a:xfrm>
-            <a:off x="8503920" y="3767328"/>
-            <a:ext cx="2468880" cy="329184"/>
-          </a:xfrm>
-          <a:prstGeom prst="rect">
-            <a:avLst/>
-          </a:prstGeom>
-          <a:noFill/>
-          <a:ln/>
-        </p:spPr>
-        <p:txBody>
-          <a:bodyPr wrap="square" lIns="0" tIns="0" rIns="0" bIns="0" rtlCol="0" anchor="ctr"/>
-          <a:lstStyle/>
-          <a:p>
-            <a:pPr algn="r" indent="0" marL="0">
-              <a:buNone/>
-            </a:pPr>
-            <a:r>
-              <a:rPr lang="en-US" sz="1500" dirty="0">
-                <a:solidFill>
-                  <a:srgbClr val="FFFFFF"/>
-                </a:solidFill>
-                <a:latin typeface="Apple SD Gothic Neo" pitchFamily="34" charset="0"/>
-                <a:ea typeface="Apple SD Gothic Neo" pitchFamily="34" charset="-122"/>
-                <a:cs typeface="Apple SD Gothic Neo" pitchFamily="34" charset="-120"/>
-              </a:rPr>
-              <a:t>정품 인증 배지</a:t>
-            </a:r>
-            <a:endParaRPr lang="en-US" sz="1500" dirty="0"/>
-          </a:p>
-        </p:txBody>
-      </p:sp>
-      <p:sp>
-        <p:nvSpPr>
-          <p:cNvPr id="13" name="Shape 10"/>
-          <p:cNvSpPr/>
-          <p:nvPr/>
-        </p:nvSpPr>
-        <p:spPr>
-          <a:xfrm>
-            <a:off x="1097280" y="4370832"/>
-            <a:ext cx="9966960" cy="0"/>
+              <a:t>MCM Gangnam</a:t>
+            </a:r>
+            <a:endParaRPr lang="en-US" sz="1300" dirty="0"/>
+          </a:p>
+        </p:txBody>
+      </p:sp>
+      <p:sp>
+        <p:nvSpPr>
+          <p:cNvPr id="11" name="Shape 8"/>
+          <p:cNvSpPr/>
+          <p:nvPr/>
+        </p:nvSpPr>
+        <p:spPr>
+          <a:xfrm>
+            <a:off x="1188720" y="3474720"/>
+            <a:ext cx="4480560" cy="0"/>
           </a:xfrm>
           <a:prstGeom prst="line">
             <a:avLst/>
@@ -12268,14 +12190,14 @@
       </p:sp>
       <p:sp>
         <p:nvSpPr>
-          <p:cNvPr id="14" name="Text 11"/>
-          <p:cNvSpPr/>
-          <p:nvPr/>
-        </p:nvSpPr>
-        <p:spPr>
-          <a:xfrm>
-            <a:off x="1188720" y="4572000"/>
-            <a:ext cx="3108960" cy="347472"/>
+          <p:cNvPr id="12" name="Text 9"/>
+          <p:cNvSpPr/>
+          <p:nvPr/>
+        </p:nvSpPr>
+        <p:spPr>
+          <a:xfrm>
+            <a:off x="1188720" y="3621024"/>
+            <a:ext cx="1554480" cy="274320"/>
           </a:xfrm>
           <a:prstGeom prst="rect">
             <a:avLst/>
@@ -12291,30 +12213,30 @@
               <a:buNone/>
             </a:pPr>
             <a:r>
-              <a:rPr lang="en-US" sz="1800" b="1" dirty="0">
-                <a:solidFill>
-                  <a:srgbClr val="C4915F"/>
-                </a:solidFill>
-                <a:latin typeface="Apple SD Gothic Neo" pitchFamily="34" charset="0"/>
-                <a:ea typeface="Apple SD Gothic Neo" pitchFamily="34" charset="-122"/>
-                <a:cs typeface="Apple SD Gothic Neo" pitchFamily="34" charset="-120"/>
-              </a:rPr>
-              <a:t>1988 Dapper Dan</a:t>
-            </a:r>
-            <a:endParaRPr lang="en-US" sz="1800" dirty="0"/>
-          </a:p>
-        </p:txBody>
-      </p:sp>
-      <p:sp>
-        <p:nvSpPr>
-          <p:cNvPr id="15" name="Text 12"/>
-          <p:cNvSpPr/>
-          <p:nvPr/>
-        </p:nvSpPr>
-        <p:spPr>
-          <a:xfrm>
-            <a:off x="4572000" y="4608576"/>
-            <a:ext cx="3657600" cy="310896"/>
+              <a:rPr lang="en-US" sz="1250" dirty="0">
+                <a:solidFill>
+                  <a:srgbClr val="6E6459"/>
+                </a:solidFill>
+                <a:latin typeface="Apple SD Gothic Neo" pitchFamily="34" charset="0"/>
+                <a:ea typeface="Apple SD Gothic Neo" pitchFamily="34" charset="-122"/>
+                <a:cs typeface="Apple SD Gothic Neo" pitchFamily="34" charset="-120"/>
+              </a:rPr>
+              <a:t>등록일</a:t>
+            </a:r>
+            <a:endParaRPr lang="en-US" sz="1250" dirty="0"/>
+          </a:p>
+        </p:txBody>
+      </p:sp>
+      <p:sp>
+        <p:nvSpPr>
+          <p:cNvPr id="13" name="Text 10"/>
+          <p:cNvSpPr/>
+          <p:nvPr/>
+        </p:nvSpPr>
+        <p:spPr>
+          <a:xfrm>
+            <a:off x="2788920" y="3611880"/>
+            <a:ext cx="2880360" cy="292608"/>
           </a:xfrm>
           <a:prstGeom prst="rect">
             <a:avLst/>
@@ -12330,46 +12252,7 @@
               <a:buNone/>
             </a:pPr>
             <a:r>
-              <a:rPr lang="en-US" sz="1400" dirty="0">
-                <a:solidFill>
-                  <a:srgbClr val="9A8F84"/>
-                </a:solidFill>
-                <a:latin typeface="Apple SD Gothic Neo" pitchFamily="34" charset="0"/>
-                <a:ea typeface="Apple SD Gothic Neo" pitchFamily="34" charset="-122"/>
-                <a:cs typeface="Apple SD Gothic Neo" pitchFamily="34" charset="-120"/>
-              </a:rPr>
-              <a:t>해체하고 다시 꿰맨 역사</a:t>
-            </a:r>
-            <a:endParaRPr lang="en-US" sz="1400" dirty="0"/>
-          </a:p>
-        </p:txBody>
-      </p:sp>
-      <p:sp>
-        <p:nvSpPr>
-          <p:cNvPr id="16" name="Text 13"/>
-          <p:cNvSpPr/>
-          <p:nvPr/>
-        </p:nvSpPr>
-        <p:spPr>
-          <a:xfrm>
-            <a:off x="8503920" y="4590288"/>
-            <a:ext cx="2468880" cy="329184"/>
-          </a:xfrm>
-          <a:prstGeom prst="rect">
-            <a:avLst/>
-          </a:prstGeom>
-          <a:noFill/>
-          <a:ln/>
-        </p:spPr>
-        <p:txBody>
-          <a:bodyPr wrap="square" lIns="0" tIns="0" rIns="0" bIns="0" rtlCol="0" anchor="ctr"/>
-          <a:lstStyle/>
-          <a:p>
-            <a:pPr algn="r" indent="0" marL="0">
-              <a:buNone/>
-            </a:pPr>
-            <a:r>
-              <a:rPr lang="en-US" sz="1500" dirty="0">
+              <a:rPr lang="en-US" sz="1300" dirty="0">
                 <a:solidFill>
                   <a:srgbClr val="FFFFFF"/>
                 </a:solidFill>
@@ -12377,22 +12260,22 @@
                 <a:ea typeface="Apple SD Gothic Neo" pitchFamily="34" charset="-122"/>
                 <a:cs typeface="Apple SD Gothic Neo" pitchFamily="34" charset="-120"/>
               </a:rPr>
-              <a:t>REMADE</a:t>
-            </a:r>
-            <a:endParaRPr lang="en-US" sz="1500" dirty="0"/>
-          </a:p>
-        </p:txBody>
-      </p:sp>
-      <p:sp>
-        <p:nvSpPr>
-          <p:cNvPr id="17" name="Shape 14"/>
-          <p:cNvSpPr/>
-          <p:nvPr/>
-        </p:nvSpPr>
-        <p:spPr>
-          <a:xfrm>
-            <a:off x="1097280" y="5193792"/>
-            <a:ext cx="9966960" cy="0"/>
+              <a:t>2026.08.19</a:t>
+            </a:r>
+            <a:endParaRPr lang="en-US" sz="1300" dirty="0"/>
+          </a:p>
+        </p:txBody>
+      </p:sp>
+      <p:sp>
+        <p:nvSpPr>
+          <p:cNvPr id="14" name="Shape 11"/>
+          <p:cNvSpPr/>
+          <p:nvPr/>
+        </p:nvSpPr>
+        <p:spPr>
+          <a:xfrm>
+            <a:off x="1188720" y="4041648"/>
+            <a:ext cx="4480560" cy="0"/>
           </a:xfrm>
           <a:prstGeom prst="line">
             <a:avLst/>
@@ -12408,14 +12291,131 @@
       </p:sp>
       <p:sp>
         <p:nvSpPr>
+          <p:cNvPr id="15" name="Text 12"/>
+          <p:cNvSpPr/>
+          <p:nvPr/>
+        </p:nvSpPr>
+        <p:spPr>
+          <a:xfrm>
+            <a:off x="1188720" y="4187952"/>
+            <a:ext cx="1554480" cy="274320"/>
+          </a:xfrm>
+          <a:prstGeom prst="rect">
+            <a:avLst/>
+          </a:prstGeom>
+          <a:noFill/>
+          <a:ln/>
+        </p:spPr>
+        <p:txBody>
+          <a:bodyPr wrap="square" lIns="0" tIns="0" rIns="0" bIns="0" rtlCol="0" anchor="ctr"/>
+          <a:lstStyle/>
+          <a:p>
+            <a:pPr indent="0" marL="0">
+              <a:buNone/>
+            </a:pPr>
+            <a:r>
+              <a:rPr lang="en-US" sz="1250" dirty="0">
+                <a:solidFill>
+                  <a:srgbClr val="6E6459"/>
+                </a:solidFill>
+                <a:latin typeface="Apple SD Gothic Neo" pitchFamily="34" charset="0"/>
+                <a:ea typeface="Apple SD Gothic Neo" pitchFamily="34" charset="-122"/>
+                <a:cs typeface="Apple SD Gothic Neo" pitchFamily="34" charset="-120"/>
+              </a:rPr>
+              <a:t>GTIN</a:t>
+            </a:r>
+            <a:endParaRPr lang="en-US" sz="1250" dirty="0"/>
+          </a:p>
+        </p:txBody>
+      </p:sp>
+      <p:sp>
+        <p:nvSpPr>
+          <p:cNvPr id="16" name="Text 13"/>
+          <p:cNvSpPr/>
+          <p:nvPr/>
+        </p:nvSpPr>
+        <p:spPr>
+          <a:xfrm>
+            <a:off x="2788920" y="4178808"/>
+            <a:ext cx="2880360" cy="292608"/>
+          </a:xfrm>
+          <a:prstGeom prst="rect">
+            <a:avLst/>
+          </a:prstGeom>
+          <a:noFill/>
+          <a:ln/>
+        </p:spPr>
+        <p:txBody>
+          <a:bodyPr wrap="square" lIns="0" tIns="0" rIns="0" bIns="0" rtlCol="0" anchor="ctr"/>
+          <a:lstStyle/>
+          <a:p>
+            <a:pPr indent="0" marL="0">
+              <a:buNone/>
+            </a:pPr>
+            <a:r>
+              <a:rPr lang="en-US" sz="1300" dirty="0">
+                <a:solidFill>
+                  <a:srgbClr val="FFFFFF"/>
+                </a:solidFill>
+                <a:latin typeface="Apple SD Gothic Neo" pitchFamily="34" charset="0"/>
+                <a:ea typeface="Apple SD Gothic Neo" pitchFamily="34" charset="-122"/>
+                <a:cs typeface="Apple SD Gothic Neo" pitchFamily="34" charset="-120"/>
+              </a:rPr>
+              <a:t>2900000000018</a:t>
+            </a:r>
+            <a:endParaRPr lang="en-US" sz="1300" dirty="0"/>
+          </a:p>
+        </p:txBody>
+      </p:sp>
+      <p:sp>
+        <p:nvSpPr>
+          <p:cNvPr id="17" name="Text 14"/>
+          <p:cNvSpPr/>
+          <p:nvPr/>
+        </p:nvSpPr>
+        <p:spPr>
+          <a:xfrm>
+            <a:off x="6309360" y="2487168"/>
+            <a:ext cx="1554480" cy="274320"/>
+          </a:xfrm>
+          <a:prstGeom prst="rect">
+            <a:avLst/>
+          </a:prstGeom>
+          <a:noFill/>
+          <a:ln/>
+        </p:spPr>
+        <p:txBody>
+          <a:bodyPr wrap="square" lIns="0" tIns="0" rIns="0" bIns="0" rtlCol="0" anchor="ctr"/>
+          <a:lstStyle/>
+          <a:p>
+            <a:pPr indent="0" marL="0">
+              <a:buNone/>
+            </a:pPr>
+            <a:r>
+              <a:rPr lang="en-US" sz="1250" dirty="0">
+                <a:solidFill>
+                  <a:srgbClr val="6E6459"/>
+                </a:solidFill>
+                <a:latin typeface="Apple SD Gothic Neo" pitchFamily="34" charset="0"/>
+                <a:ea typeface="Apple SD Gothic Neo" pitchFamily="34" charset="-122"/>
+                <a:cs typeface="Apple SD Gothic Neo" pitchFamily="34" charset="-120"/>
+              </a:rPr>
+              <a:t>원산지</a:t>
+            </a:r>
+            <a:endParaRPr lang="en-US" sz="1250" dirty="0"/>
+          </a:p>
+        </p:txBody>
+      </p:sp>
+      <p:sp>
+        <p:nvSpPr>
           <p:cNvPr id="18" name="Text 15"/>
           <p:cNvSpPr/>
           <p:nvPr/>
         </p:nvSpPr>
         <p:spPr>
           <a:xfrm>
-            <a:off x="1188720" y="5394960"/>
-            <a:ext cx="3108960" cy="347472"/>
+            <a:off x="7909560" y="2478024"/>
+            <a:ext cx="2880360" cy="292608"/>
           </a:xfrm>
           <a:prstGeom prst="rect">
             <a:avLst/>
@@ -12431,30 +12431,53 @@
               <a:buNone/>
             </a:pPr>
             <a:r>
-              <a:rPr lang="en-US" sz="1800" b="1" dirty="0">
-                <a:solidFill>
-                  <a:srgbClr val="C4915F"/>
-                </a:solidFill>
-                <a:latin typeface="Apple SD Gothic Neo" pitchFamily="34" charset="0"/>
-                <a:ea typeface="Apple SD Gothic Neo" pitchFamily="34" charset="-122"/>
-                <a:cs typeface="Apple SD Gothic Neo" pitchFamily="34" charset="-120"/>
-              </a:rPr>
-              <a:t>NFC + Aura DPP</a:t>
-            </a:r>
-            <a:endParaRPr lang="en-US" sz="1800" dirty="0"/>
-          </a:p>
-        </p:txBody>
-      </p:sp>
-      <p:sp>
-        <p:nvSpPr>
-          <p:cNvPr id="19" name="Text 16"/>
-          <p:cNvSpPr/>
-          <p:nvPr/>
-        </p:nvSpPr>
-        <p:spPr>
-          <a:xfrm>
-            <a:off x="4572000" y="5431536"/>
-            <a:ext cx="3657600" cy="310896"/>
+              <a:rPr lang="en-US" sz="1300" dirty="0">
+                <a:solidFill>
+                  <a:srgbClr val="FFFFFF"/>
+                </a:solidFill>
+                <a:latin typeface="Apple SD Gothic Neo" pitchFamily="34" charset="0"/>
+                <a:ea typeface="Apple SD Gothic Neo" pitchFamily="34" charset="-122"/>
+                <a:cs typeface="Apple SD Gothic Neo" pitchFamily="34" charset="-120"/>
+              </a:rPr>
+              <a:t>IT</a:t>
+            </a:r>
+            <a:endParaRPr lang="en-US" sz="1300" dirty="0"/>
+          </a:p>
+        </p:txBody>
+      </p:sp>
+      <p:sp>
+        <p:nvSpPr>
+          <p:cNvPr id="19" name="Shape 16"/>
+          <p:cNvSpPr/>
+          <p:nvPr/>
+        </p:nvSpPr>
+        <p:spPr>
+          <a:xfrm>
+            <a:off x="6309360" y="2907792"/>
+            <a:ext cx="4480560" cy="0"/>
+          </a:xfrm>
+          <a:prstGeom prst="line">
+            <a:avLst/>
+          </a:prstGeom>
+          <a:noFill/>
+          <a:ln w="9525">
+            <a:solidFill>
+              <a:srgbClr val="3A3025"/>
+            </a:solidFill>
+            <a:prstDash val="solid"/>
+          </a:ln>
+        </p:spPr>
+      </p:sp>
+      <p:sp>
+        <p:nvSpPr>
+          <p:cNvPr id="20" name="Text 17"/>
+          <p:cNvSpPr/>
+          <p:nvPr/>
+        </p:nvSpPr>
+        <p:spPr>
+          <a:xfrm>
+            <a:off x="6309360" y="3054096"/>
+            <a:ext cx="1554480" cy="274320"/>
           </a:xfrm>
           <a:prstGeom prst="rect">
             <a:avLst/>
@@ -12470,7 +12493,329 @@
               <a:buNone/>
             </a:pPr>
             <a:r>
-              <a:rPr lang="en-US" sz="1400" dirty="0">
+              <a:rPr lang="en-US" sz="1250" dirty="0">
+                <a:solidFill>
+                  <a:srgbClr val="6E6459"/>
+                </a:solidFill>
+                <a:latin typeface="Apple SD Gothic Neo" pitchFamily="34" charset="0"/>
+                <a:ea typeface="Apple SD Gothic Neo" pitchFamily="34" charset="-122"/>
+                <a:cs typeface="Apple SD Gothic Neo" pitchFamily="34" charset="-120"/>
+              </a:rPr>
+              <a:t>소재 구성</a:t>
+            </a:r>
+            <a:endParaRPr lang="en-US" sz="1250" dirty="0"/>
+          </a:p>
+        </p:txBody>
+      </p:sp>
+      <p:sp>
+        <p:nvSpPr>
+          <p:cNvPr id="21" name="Text 18"/>
+          <p:cNvSpPr/>
+          <p:nvPr/>
+        </p:nvSpPr>
+        <p:spPr>
+          <a:xfrm>
+            <a:off x="7909560" y="3044952"/>
+            <a:ext cx="2880360" cy="292608"/>
+          </a:xfrm>
+          <a:prstGeom prst="rect">
+            <a:avLst/>
+          </a:prstGeom>
+          <a:noFill/>
+          <a:ln/>
+        </p:spPr>
+        <p:txBody>
+          <a:bodyPr wrap="square" lIns="0" tIns="0" rIns="0" bIns="0" rtlCol="0" anchor="ctr"/>
+          <a:lstStyle/>
+          <a:p>
+            <a:pPr indent="0" marL="0">
+              <a:buNone/>
+            </a:pPr>
+            <a:r>
+              <a:rPr lang="en-US" sz="1300" dirty="0">
+                <a:solidFill>
+                  <a:srgbClr val="FFFFFF"/>
+                </a:solidFill>
+                <a:latin typeface="Apple SD Gothic Neo" pitchFamily="34" charset="0"/>
+                <a:ea typeface="Apple SD Gothic Neo" pitchFamily="34" charset="-122"/>
+                <a:cs typeface="Apple SD Gothic Neo" pitchFamily="34" charset="-120"/>
+              </a:rPr>
+              <a:t>coated canvas 72% · calf 24% · brass 4%</a:t>
+            </a:r>
+            <a:endParaRPr lang="en-US" sz="1300" dirty="0"/>
+          </a:p>
+        </p:txBody>
+      </p:sp>
+      <p:sp>
+        <p:nvSpPr>
+          <p:cNvPr id="22" name="Shape 19"/>
+          <p:cNvSpPr/>
+          <p:nvPr/>
+        </p:nvSpPr>
+        <p:spPr>
+          <a:xfrm>
+            <a:off x="6309360" y="3474720"/>
+            <a:ext cx="4480560" cy="0"/>
+          </a:xfrm>
+          <a:prstGeom prst="line">
+            <a:avLst/>
+          </a:prstGeom>
+          <a:noFill/>
+          <a:ln w="9525">
+            <a:solidFill>
+              <a:srgbClr val="3A3025"/>
+            </a:solidFill>
+            <a:prstDash val="solid"/>
+          </a:ln>
+        </p:spPr>
+      </p:sp>
+      <p:sp>
+        <p:nvSpPr>
+          <p:cNvPr id="23" name="Text 20"/>
+          <p:cNvSpPr/>
+          <p:nvPr/>
+        </p:nvSpPr>
+        <p:spPr>
+          <a:xfrm>
+            <a:off x="6309360" y="3621024"/>
+            <a:ext cx="1554480" cy="274320"/>
+          </a:xfrm>
+          <a:prstGeom prst="rect">
+            <a:avLst/>
+          </a:prstGeom>
+          <a:noFill/>
+          <a:ln/>
+        </p:spPr>
+        <p:txBody>
+          <a:bodyPr wrap="square" lIns="0" tIns="0" rIns="0" bIns="0" rtlCol="0" anchor="ctr"/>
+          <a:lstStyle/>
+          <a:p>
+            <a:pPr indent="0" marL="0">
+              <a:buNone/>
+            </a:pPr>
+            <a:r>
+              <a:rPr lang="en-US" sz="1250" dirty="0">
+                <a:solidFill>
+                  <a:srgbClr val="6E6459"/>
+                </a:solidFill>
+                <a:latin typeface="Apple SD Gothic Neo" pitchFamily="34" charset="0"/>
+                <a:ea typeface="Apple SD Gothic Neo" pitchFamily="34" charset="-122"/>
+                <a:cs typeface="Apple SD Gothic Neo" pitchFamily="34" charset="-120"/>
+              </a:rPr>
+              <a:t>재활용 함량</a:t>
+            </a:r>
+            <a:endParaRPr lang="en-US" sz="1250" dirty="0"/>
+          </a:p>
+        </p:txBody>
+      </p:sp>
+      <p:sp>
+        <p:nvSpPr>
+          <p:cNvPr id="24" name="Text 21"/>
+          <p:cNvSpPr/>
+          <p:nvPr/>
+        </p:nvSpPr>
+        <p:spPr>
+          <a:xfrm>
+            <a:off x="7909560" y="3611880"/>
+            <a:ext cx="2880360" cy="292608"/>
+          </a:xfrm>
+          <a:prstGeom prst="rect">
+            <a:avLst/>
+          </a:prstGeom>
+          <a:noFill/>
+          <a:ln/>
+        </p:spPr>
+        <p:txBody>
+          <a:bodyPr wrap="square" lIns="0" tIns="0" rIns="0" bIns="0" rtlCol="0" anchor="ctr"/>
+          <a:lstStyle/>
+          <a:p>
+            <a:pPr indent="0" marL="0">
+              <a:buNone/>
+            </a:pPr>
+            <a:r>
+              <a:rPr lang="en-US" sz="1300" dirty="0">
+                <a:solidFill>
+                  <a:srgbClr val="FFFFFF"/>
+                </a:solidFill>
+                <a:latin typeface="Apple SD Gothic Neo" pitchFamily="34" charset="0"/>
+                <a:ea typeface="Apple SD Gothic Neo" pitchFamily="34" charset="-122"/>
+                <a:cs typeface="Apple SD Gothic Neo" pitchFamily="34" charset="-120"/>
+              </a:rPr>
+              <a:t>18%</a:t>
+            </a:r>
+            <a:endParaRPr lang="en-US" sz="1300" dirty="0"/>
+          </a:p>
+        </p:txBody>
+      </p:sp>
+      <p:sp>
+        <p:nvSpPr>
+          <p:cNvPr id="25" name="Shape 22"/>
+          <p:cNvSpPr/>
+          <p:nvPr/>
+        </p:nvSpPr>
+        <p:spPr>
+          <a:xfrm>
+            <a:off x="6309360" y="4041648"/>
+            <a:ext cx="4480560" cy="0"/>
+          </a:xfrm>
+          <a:prstGeom prst="line">
+            <a:avLst/>
+          </a:prstGeom>
+          <a:noFill/>
+          <a:ln w="9525">
+            <a:solidFill>
+              <a:srgbClr val="3A3025"/>
+            </a:solidFill>
+            <a:prstDash val="solid"/>
+          </a:ln>
+        </p:spPr>
+      </p:sp>
+      <p:sp>
+        <p:nvSpPr>
+          <p:cNvPr id="26" name="Text 23"/>
+          <p:cNvSpPr/>
+          <p:nvPr/>
+        </p:nvSpPr>
+        <p:spPr>
+          <a:xfrm>
+            <a:off x="6309360" y="4187952"/>
+            <a:ext cx="1554480" cy="274320"/>
+          </a:xfrm>
+          <a:prstGeom prst="rect">
+            <a:avLst/>
+          </a:prstGeom>
+          <a:noFill/>
+          <a:ln/>
+        </p:spPr>
+        <p:txBody>
+          <a:bodyPr wrap="square" lIns="0" tIns="0" rIns="0" bIns="0" rtlCol="0" anchor="ctr"/>
+          <a:lstStyle/>
+          <a:p>
+            <a:pPr indent="0" marL="0">
+              <a:buNone/>
+            </a:pPr>
+            <a:r>
+              <a:rPr lang="en-US" sz="1250" dirty="0">
+                <a:solidFill>
+                  <a:srgbClr val="6E6459"/>
+                </a:solidFill>
+                <a:latin typeface="Apple SD Gothic Neo" pitchFamily="34" charset="0"/>
+                <a:ea typeface="Apple SD Gothic Neo" pitchFamily="34" charset="-122"/>
+                <a:cs typeface="Apple SD Gothic Neo" pitchFamily="34" charset="-120"/>
+              </a:rPr>
+              <a:t>수리가능성</a:t>
+            </a:r>
+            <a:endParaRPr lang="en-US" sz="1250" dirty="0"/>
+          </a:p>
+        </p:txBody>
+      </p:sp>
+      <p:sp>
+        <p:nvSpPr>
+          <p:cNvPr id="27" name="Text 24"/>
+          <p:cNvSpPr/>
+          <p:nvPr/>
+        </p:nvSpPr>
+        <p:spPr>
+          <a:xfrm>
+            <a:off x="7909560" y="4178808"/>
+            <a:ext cx="2880360" cy="292608"/>
+          </a:xfrm>
+          <a:prstGeom prst="rect">
+            <a:avLst/>
+          </a:prstGeom>
+          <a:noFill/>
+          <a:ln/>
+        </p:spPr>
+        <p:txBody>
+          <a:bodyPr wrap="square" lIns="0" tIns="0" rIns="0" bIns="0" rtlCol="0" anchor="ctr"/>
+          <a:lstStyle/>
+          <a:p>
+            <a:pPr indent="0" marL="0">
+              <a:buNone/>
+            </a:pPr>
+            <a:r>
+              <a:rPr lang="en-US" sz="1300" dirty="0">
+                <a:solidFill>
+                  <a:srgbClr val="FFFFFF"/>
+                </a:solidFill>
+                <a:latin typeface="Apple SD Gothic Neo" pitchFamily="34" charset="0"/>
+                <a:ea typeface="Apple SD Gothic Neo" pitchFamily="34" charset="-122"/>
+                <a:cs typeface="Apple SD Gothic Neo" pitchFamily="34" charset="-120"/>
+              </a:rPr>
+              <a:t>8.2 / 10</a:t>
+            </a:r>
+            <a:endParaRPr lang="en-US" sz="1300" dirty="0"/>
+          </a:p>
+        </p:txBody>
+      </p:sp>
+      <p:sp>
+        <p:nvSpPr>
+          <p:cNvPr id="28" name="Text 25"/>
+          <p:cNvSpPr/>
+          <p:nvPr/>
+        </p:nvSpPr>
+        <p:spPr>
+          <a:xfrm>
+            <a:off x="914400" y="4956048"/>
+            <a:ext cx="10332720" cy="365760"/>
+          </a:xfrm>
+          <a:prstGeom prst="rect">
+            <a:avLst/>
+          </a:prstGeom>
+          <a:noFill/>
+          <a:ln/>
+        </p:spPr>
+        <p:txBody>
+          <a:bodyPr wrap="square" lIns="0" tIns="0" rIns="0" bIns="0" rtlCol="0" anchor="ctr"/>
+          <a:lstStyle/>
+          <a:p>
+            <a:pPr algn="ctr" indent="0" marL="0">
+              <a:buNone/>
+            </a:pPr>
+            <a:r>
+              <a:rPr lang="en-US" sz="1700" b="1" dirty="0">
+                <a:solidFill>
+                  <a:srgbClr val="FFFFFF"/>
+                </a:solidFill>
+                <a:latin typeface="Apple SD Gothic Neo" pitchFamily="34" charset="0"/>
+                <a:ea typeface="Apple SD Gothic Neo" pitchFamily="34" charset="-122"/>
+                <a:cs typeface="Apple SD Gothic Neo" pitchFamily="34" charset="-120"/>
+              </a:rPr>
+              <a:t>EU ESPR 여권 항목을 그대로 채웁니다. GS1 Digital Link 표준 태그로 도착합니다.</a:t>
+            </a:r>
+            <a:endParaRPr lang="en-US" sz="1700" dirty="0"/>
+          </a:p>
+        </p:txBody>
+      </p:sp>
+      <p:sp>
+        <p:nvSpPr>
+          <p:cNvPr id="29" name="Text 26"/>
+          <p:cNvSpPr/>
+          <p:nvPr/>
+        </p:nvSpPr>
+        <p:spPr>
+          <a:xfrm>
+            <a:off x="914400" y="5413248"/>
+            <a:ext cx="10332720" cy="694944"/>
+          </a:xfrm>
+          <a:prstGeom prst="rect">
+            <a:avLst/>
+          </a:prstGeom>
+          <a:noFill/>
+          <a:ln/>
+        </p:spPr>
+        <p:txBody>
+          <a:bodyPr wrap="square" lIns="0" tIns="0" rIns="0" bIns="0" rtlCol="0" anchor="ctr"/>
+          <a:lstStyle/>
+          <a:p>
+            <a:pPr algn="ctr" indent="0" marL="0">
+              <a:lnSpc>
+                <a:spcPts val="2100"/>
+              </a:lnSpc>
+              <a:buNone/>
+            </a:pPr>
+            <a:r>
+              <a:rPr lang="en-US" sz="1300" dirty="0">
                 <a:solidFill>
                   <a:srgbClr val="9A8F84"/>
                 </a:solidFill>
@@ -12478,48 +12823,68 @@
                 <a:ea typeface="Apple SD Gothic Neo" pitchFamily="34" charset="-122"/>
                 <a:cs typeface="Apple SD Gothic Neo" pitchFamily="34" charset="-120"/>
               </a:rPr>
-              <a:t>이미 운영 중</a:t>
-            </a:r>
-            <a:endParaRPr lang="en-US" sz="1400" dirty="0"/>
-          </a:p>
-        </p:txBody>
-      </p:sp>
-      <p:sp>
-        <p:nvSpPr>
-          <p:cNvPr id="20" name="Text 17"/>
-          <p:cNvSpPr/>
-          <p:nvPr/>
-        </p:nvSpPr>
-        <p:spPr>
-          <a:xfrm>
-            <a:off x="8503920" y="5413248"/>
-            <a:ext cx="2468880" cy="329184"/>
-          </a:xfrm>
-          <a:prstGeom prst="rect">
-            <a:avLst/>
-          </a:prstGeom>
-          <a:noFill/>
-          <a:ln/>
-        </p:spPr>
-        <p:txBody>
-          <a:bodyPr wrap="square" lIns="0" tIns="0" rIns="0" bIns="0" rtlCol="0" anchor="ctr"/>
+              <a:t>소재 · 재활용 · 수리가능성 수치는 화면에 “시연용 가정치”라고 함께 띄웁니다.</a:t>
+            </a:r>
+            <a:endParaRPr lang="en-US" sz="1300" dirty="0"/>
+          </a:p>
+          <a:p>
+            <a:pPr algn="ctr" indent="0" marL="0">
+              <a:lnSpc>
+                <a:spcPts val="2100"/>
+              </a:lnSpc>
+              <a:buNone/>
+            </a:pPr>
+            <a:r>
+              <a:rPr lang="en-US" sz="1300" dirty="0">
+                <a:solidFill>
+                  <a:srgbClr val="9A8F84"/>
+                </a:solidFill>
+                <a:latin typeface="Apple SD Gothic Neo" pitchFamily="34" charset="0"/>
+                <a:ea typeface="Apple SD Gothic Neo" pitchFamily="34" charset="-122"/>
+                <a:cs typeface="Apple SD Gothic Neo" pitchFamily="34" charset="-120"/>
+              </a:rPr>
+              <a:t>블록체인 원장 기록은 “아직 연결되지 않았습니다”라고 적습니다.</a:t>
+            </a:r>
+            <a:endParaRPr lang="en-US" sz="1300" dirty="0"/>
+          </a:p>
+        </p:txBody>
+      </p:sp>
+      <p:sp>
+        <p:nvSpPr>
+          <p:cNvPr id="30" name="Text 27"/>
+          <p:cNvSpPr/>
+          <p:nvPr/>
+        </p:nvSpPr>
+        <p:spPr>
+          <a:xfrm>
+            <a:off x="9052560" y="6355080"/>
+            <a:ext cx="2651760" cy="274320"/>
+          </a:xfrm>
+          <a:prstGeom prst="rect">
+            <a:avLst/>
+          </a:prstGeom>
+          <a:noFill/>
+          <a:ln/>
+        </p:spPr>
+        <p:txBody>
+          <a:bodyPr wrap="square" rtlCol="0" anchor="ctr"/>
           <a:lstStyle/>
           <a:p>
             <a:pPr algn="r" indent="0" marL="0">
               <a:buNone/>
             </a:pPr>
             <a:r>
-              <a:rPr lang="en-US" sz="1500" dirty="0">
-                <a:solidFill>
-                  <a:srgbClr val="FFFFFF"/>
-                </a:solidFill>
-                <a:latin typeface="Apple SD Gothic Neo" pitchFamily="34" charset="0"/>
-                <a:ea typeface="Apple SD Gothic Neo" pitchFamily="34" charset="-122"/>
-                <a:cs typeface="Apple SD Gothic Neo" pitchFamily="34" charset="-120"/>
-              </a:rPr>
-              <a:t>그 위에 얹는다</a:t>
-            </a:r>
-            <a:endParaRPr lang="en-US" sz="1500" dirty="0"/>
+              <a:rPr lang="en-US" sz="900" spc="140" kern="0" dirty="0">
+                <a:solidFill>
+                  <a:srgbClr val="4A423A"/>
+                </a:solidFill>
+                <a:latin typeface="Apple SD Gothic Neo" pitchFamily="34" charset="0"/>
+                <a:ea typeface="Apple SD Gothic Neo" pitchFamily="34" charset="-122"/>
+                <a:cs typeface="Apple SD Gothic Neo" pitchFamily="34" charset="-120"/>
+              </a:rPr>
+              <a:t>MCM LUXURY BOOK</a:t>
+            </a:r>
+            <a:endParaRPr lang="en-US" sz="900" dirty="0"/>
           </a:p>
         </p:txBody>
       </p:sp>
@@ -16754,6 +17119,45 @@
         </p:nvSpPr>
         <p:spPr>
           <a:xfrm>
+            <a:off x="914400" y="4626864"/>
+            <a:ext cx="10332720" cy="310896"/>
+          </a:xfrm>
+          <a:prstGeom prst="rect">
+            <a:avLst/>
+          </a:prstGeom>
+          <a:noFill/>
+          <a:ln/>
+        </p:spPr>
+        <p:txBody>
+          <a:bodyPr wrap="square" lIns="0" tIns="0" rIns="0" bIns="0" rtlCol="0" anchor="ctr"/>
+          <a:lstStyle/>
+          <a:p>
+            <a:pPr algn="ctr" indent="0" marL="0">
+              <a:buNone/>
+            </a:pPr>
+            <a:r>
+              <a:rPr lang="en-US" sz="1400" dirty="0">
+                <a:solidFill>
+                  <a:srgbClr val="9A8F84"/>
+                </a:solidFill>
+                <a:latin typeface="Apple SD Gothic Neo" pitchFamily="34" charset="0"/>
+                <a:ea typeface="Apple SD Gothic Neo" pitchFamily="34" charset="-122"/>
+                <a:cs typeface="Apple SD Gothic Neo" pitchFamily="34" charset="-120"/>
+              </a:rPr>
+              <a:t>EU ESPR 여권 항목은 이미 화면에 채워져 있습니다</a:t>
+            </a:r>
+            <a:endParaRPr lang="en-US" sz="1400" dirty="0"/>
+          </a:p>
+        </p:txBody>
+      </p:sp>
+      <p:sp>
+        <p:nvSpPr>
+          <p:cNvPr id="10" name="Text 7"/>
+          <p:cNvSpPr/>
+          <p:nvPr/>
+        </p:nvSpPr>
+        <p:spPr>
+          <a:xfrm>
             <a:off x="914400" y="5212080"/>
             <a:ext cx="10332720" cy="402336"/>
           </a:xfrm>
@@ -16787,7 +17191,7 @@
       </p:sp>
       <p:sp>
         <p:nvSpPr>
-          <p:cNvPr id="10" name="Text 7"/>
+          <p:cNvPr id="11" name="Text 8"/>
           <p:cNvSpPr/>
           <p:nvPr/>
         </p:nvSpPr>

--- a/docs/ir/MCM_Luxury_Book_IR.pptx
+++ b/docs/ir/MCM_Luxury_Book_IR.pptx
@@ -535,7 +535,7 @@
           <a:p>
             <a:r>
               <a:rPr lang="en-US" dirty="0"/>
-              <a:t>럭셔리는 새것일 때 가장 비쌉니다. 그래서 사람들은 쓰기를 두려워합니다. 저희는 그 방향을 뒤집었습니다.</a:t>
+              <a:t/>
             </a:r>
             <a:endParaRPr lang="en-US" dirty="0"/>
           </a:p>
@@ -3883,8 +3883,8 @@
         </p:nvSpPr>
         <p:spPr>
           <a:xfrm>
-            <a:off x="868680" y="2286000"/>
-            <a:ext cx="10607040" cy="2011680"/>
+            <a:off x="868680" y="2212848"/>
+            <a:ext cx="10607040" cy="548640"/>
           </a:xfrm>
           <a:prstGeom prst="rect">
             <a:avLst/>
@@ -3897,13 +3897,10 @@
           <a:lstStyle/>
           <a:p>
             <a:pPr indent="0" marL="0">
-              <a:lnSpc>
-                <a:spcPts val="7400"/>
-              </a:lnSpc>
-              <a:buNone/>
-            </a:pPr>
-            <a:r>
-              <a:rPr lang="en-US" sz="5200" b="1" dirty="0">
+              <a:buNone/>
+            </a:pPr>
+            <a:r>
+              <a:rPr lang="en-US" sz="2600" dirty="0">
                 <a:solidFill>
                   <a:srgbClr val="FFFFFF"/>
                 </a:solidFill>
@@ -3911,19 +3908,52 @@
                 <a:ea typeface="Apple SD Gothic Neo" pitchFamily="34" charset="-122"/>
                 <a:cs typeface="Apple SD Gothic Neo" pitchFamily="34" charset="-120"/>
               </a:rPr>
-              <a:t>흠을 지우지 않습니다.</a:t>
-            </a:r>
-            <a:endParaRPr lang="en-US" sz="5200" dirty="0"/>
-          </a:p>
+              <a:t>MCM과 함께하는</a:t>
+            </a:r>
+            <a:endParaRPr lang="en-US" sz="2600" dirty="0"/>
+          </a:p>
+        </p:txBody>
+      </p:sp>
+      <p:sp>
+        <p:nvSpPr>
+          <p:cNvPr id="5" name="Text 2"/>
+          <p:cNvSpPr/>
+          <p:nvPr/>
+        </p:nvSpPr>
+        <p:spPr>
+          <a:xfrm>
+            <a:off x="822960" y="2761488"/>
+            <a:ext cx="10607040" cy="1371600"/>
+          </a:xfrm>
+          <a:prstGeom prst="rect">
+            <a:avLst/>
+          </a:prstGeom>
+          <a:noFill/>
+          <a:ln/>
+        </p:spPr>
+        <p:txBody>
+          <a:bodyPr wrap="square" lIns="0" tIns="0" rIns="0" bIns="0" rtlCol="0" anchor="ctr"/>
+          <a:lstStyle/>
           <a:p>
             <a:pPr indent="0" marL="0">
-              <a:lnSpc>
-                <a:spcPts val="7400"/>
-              </a:lnSpc>
-              <a:buNone/>
-            </a:pPr>
-            <a:r>
-              <a:rPr lang="en-US" sz="5200" b="1" dirty="0">
+              <a:buNone/>
+            </a:pPr>
+            <a:r>
+              <a:rPr lang="en-US" sz="7600" b="1" spc="-100" kern="0" dirty="0">
+                <a:solidFill>
+                  <a:srgbClr val="FFFFFF"/>
+                </a:solidFill>
+                <a:latin typeface="Apple SD Gothic Neo" pitchFamily="34" charset="0"/>
+                <a:ea typeface="Apple SD Gothic Neo" pitchFamily="34" charset="-122"/>
+                <a:cs typeface="Apple SD Gothic Neo" pitchFamily="34" charset="-120"/>
+              </a:rPr>
+              <a:t>hi</a:t>
+            </a:r>
+            <a:pPr indent="0" marL="0">
+              <a:buNone/>
+            </a:pPr>
+            <a:r>
+              <a:rPr lang="en-US" sz="7600" b="1" spc="-100" kern="0" dirty="0">
                 <a:solidFill>
                   <a:srgbClr val="C4915F"/>
                 </a:solidFill>
@@ -3931,21 +3961,60 @@
                 <a:ea typeface="Apple SD Gothic Neo" pitchFamily="34" charset="-122"/>
                 <a:cs typeface="Apple SD Gothic Neo" pitchFamily="34" charset="-120"/>
               </a:rPr>
-              <a:t>나의 것으로 만듭니다</a:t>
-            </a:r>
-            <a:endParaRPr lang="en-US" sz="5200" dirty="0"/>
-          </a:p>
-        </p:txBody>
-      </p:sp>
-      <p:sp>
-        <p:nvSpPr>
-          <p:cNvPr id="5" name="Text 2"/>
-          <p:cNvSpPr/>
-          <p:nvPr/>
-        </p:nvSpPr>
-        <p:spPr>
-          <a:xfrm>
-            <a:off x="896112" y="4937760"/>
+              <a:t>_story</a:t>
+            </a:r>
+            <a:endParaRPr lang="en-US" sz="7600" dirty="0"/>
+          </a:p>
+        </p:txBody>
+      </p:sp>
+      <p:sp>
+        <p:nvSpPr>
+          <p:cNvPr id="6" name="Text 3"/>
+          <p:cNvSpPr/>
+          <p:nvPr/>
+        </p:nvSpPr>
+        <p:spPr>
+          <a:xfrm>
+            <a:off x="896112" y="4443984"/>
+            <a:ext cx="10058400" cy="384048"/>
+          </a:xfrm>
+          <a:prstGeom prst="rect">
+            <a:avLst/>
+          </a:prstGeom>
+          <a:noFill/>
+          <a:ln/>
+        </p:spPr>
+        <p:txBody>
+          <a:bodyPr wrap="square" lIns="0" tIns="0" rIns="0" bIns="0" rtlCol="0" anchor="ctr"/>
+          <a:lstStyle/>
+          <a:p>
+            <a:pPr indent="0" marL="0">
+              <a:buNone/>
+            </a:pPr>
+            <a:r>
+              <a:rPr lang="en-US" sz="1700" dirty="0">
+                <a:solidFill>
+                  <a:srgbClr val="9A8F84"/>
+                </a:solidFill>
+                <a:latin typeface="Apple SD Gothic Neo" pitchFamily="34" charset="0"/>
+                <a:ea typeface="Apple SD Gothic Neo" pitchFamily="34" charset="-122"/>
+                <a:cs typeface="Apple SD Gothic Neo" pitchFamily="34" charset="-120"/>
+              </a:rPr>
+              <a:t>흠을 지우지 않습니다. 나의 것으로 만듭니다</a:t>
+            </a:r>
+            <a:endParaRPr lang="en-US" sz="1700" dirty="0"/>
+          </a:p>
+        </p:txBody>
+      </p:sp>
+      <p:sp>
+        <p:nvSpPr>
+          <p:cNvPr id="7" name="Text 4"/>
+          <p:cNvSpPr/>
+          <p:nvPr/>
+        </p:nvSpPr>
+        <p:spPr>
+          <a:xfrm>
+            <a:off x="896112" y="4974336"/>
             <a:ext cx="10058400" cy="310896"/>
           </a:xfrm>
           <a:prstGeom prst="rect">
